--- a/presentations/SS_L04_UtilityWorkshop_Lesson.pptx
+++ b/presentations/SS_L04_UtilityWorkshop_Lesson.pptx
@@ -2167,7 +2167,7 @@
                 <a:ea typeface="IBM Plex Sans" pitchFamily="34" charset="-122"/>
                 <a:cs typeface="IBM Plex Sans" pitchFamily="34" charset="-120"/>
               </a:rPr>
-              <a:t>Utility software is the quiet half of systems software. It never produces a document or a picture: its whole job is to look after the machine itself, by encrypting it, tidying it, shrinking files and keeping a copy of everything.</a:t>
+              <a:t>Utility software doesn't do your work: it looks after the machine. Meet the three you need to know, and defragment a disk yourself.</a:t>
             </a:r>
             <a:endParaRPr lang="en-US" sz="1800" dirty="0"/>
           </a:p>
@@ -3080,7 +3080,7 @@
                 <a:ea typeface="IBM Plex Sans" pitchFamily="34" charset="-122"/>
                 <a:cs typeface="IBM Plex Sans" pitchFamily="34" charset="-120"/>
               </a:rPr>
-              <a:t>Defragment this disk, then say what the read/write head no longer has to do.</a:t>
+              <a:t>One disk to tidy, then decide which utility each situation needs. Tap the star to begin.</a:t>
             </a:r>
             <a:endParaRPr lang="en-US" sz="2200" dirty="0"/>
           </a:p>
@@ -6018,7 +6018,7 @@
         <p:spPr>
           <a:xfrm>
             <a:off x="3474720" y="5468112"/>
-            <a:ext cx="2651760" cy="402336"/>
+            <a:ext cx="1920240" cy="402336"/>
           </a:xfrm>
           <a:prstGeom prst="roundRect">
             <a:avLst>
@@ -6045,7 +6045,7 @@
         <p:spPr>
           <a:xfrm>
             <a:off x="3474720" y="5468112"/>
-            <a:ext cx="2651760" cy="402336"/>
+            <a:ext cx="1920240" cy="402336"/>
           </a:xfrm>
           <a:prstGeom prst="rect">
             <a:avLst/>
@@ -6069,7 +6069,205 @@
                 <a:ea typeface="IBM Plex Sans" pitchFamily="34" charset="-122"/>
                 <a:cs typeface="IBM Plex Sans" pitchFamily="34" charset="-120"/>
               </a:rPr>
+              <a:t>Encryption</a:t>
+            </a:r>
+            <a:endParaRPr lang="en-US" sz="1200" dirty="0"/>
+          </a:p>
+        </p:txBody>
+      </p:sp>
+      <p:sp>
+        <p:nvSpPr>
+          <p:cNvPr id="21" name="Shape 19"/>
+          <p:cNvSpPr/>
+          <p:nvPr/>
+        </p:nvSpPr>
+        <p:spPr>
+          <a:xfrm>
+            <a:off x="5522976" y="5468112"/>
+            <a:ext cx="1920240" cy="402336"/>
+          </a:xfrm>
+          <a:prstGeom prst="roundRect">
+            <a:avLst>
+              <a:gd name="adj" fmla="val 50000"/>
+            </a:avLst>
+          </a:prstGeom>
+          <a:solidFill>
+            <a:srgbClr val="FFFFFF"/>
+          </a:solidFill>
+          <a:ln w="12700">
+            <a:solidFill>
+              <a:srgbClr val="2D63FF"/>
+            </a:solidFill>
+            <a:prstDash val="solid"/>
+          </a:ln>
+        </p:spPr>
+      </p:sp>
+      <p:sp>
+        <p:nvSpPr>
+          <p:cNvPr id="22" name="Text 20"/>
+          <p:cNvSpPr txBox="1"/>
+          <p:nvPr/>
+        </p:nvSpPr>
+        <p:spPr>
+          <a:xfrm>
+            <a:off x="5522976" y="5468112"/>
+            <a:ext cx="1920240" cy="402336"/>
+          </a:xfrm>
+          <a:prstGeom prst="rect">
+            <a:avLst/>
+          </a:prstGeom>
+          <a:noFill/>
+          <a:ln/>
+        </p:spPr>
+        <p:txBody>
+          <a:bodyPr wrap="square" lIns="0" tIns="0" rIns="0" bIns="0" rtlCol="0" anchor="ctr"/>
+          <a:lstStyle/>
+          <a:p>
+            <a:pPr algn="ctr" indent="0" marL="0">
+              <a:buNone/>
+            </a:pPr>
+            <a:r>
+              <a:rPr lang="en-US" sz="1200" dirty="0">
+                <a:solidFill>
+                  <a:srgbClr val="2D63FF"/>
+                </a:solidFill>
+                <a:latin typeface="IBM Plex Sans" pitchFamily="34" charset="0"/>
+                <a:ea typeface="IBM Plex Sans" pitchFamily="34" charset="-122"/>
+                <a:cs typeface="IBM Plex Sans" pitchFamily="34" charset="-120"/>
+              </a:rPr>
+              <a:t>Cyphertext</a:t>
+            </a:r>
+            <a:endParaRPr lang="en-US" sz="1200" dirty="0"/>
+          </a:p>
+        </p:txBody>
+      </p:sp>
+      <p:sp>
+        <p:nvSpPr>
+          <p:cNvPr id="23" name="Shape 21"/>
+          <p:cNvSpPr/>
+          <p:nvPr/>
+        </p:nvSpPr>
+        <p:spPr>
+          <a:xfrm>
+            <a:off x="7571232" y="5468112"/>
+            <a:ext cx="2651760" cy="402336"/>
+          </a:xfrm>
+          <a:prstGeom prst="roundRect">
+            <a:avLst>
+              <a:gd name="adj" fmla="val 50000"/>
+            </a:avLst>
+          </a:prstGeom>
+          <a:solidFill>
+            <a:srgbClr val="FFFFFF"/>
+          </a:solidFill>
+          <a:ln w="12700">
+            <a:solidFill>
+              <a:srgbClr val="2D63FF"/>
+            </a:solidFill>
+            <a:prstDash val="solid"/>
+          </a:ln>
+        </p:spPr>
+      </p:sp>
+      <p:sp>
+        <p:nvSpPr>
+          <p:cNvPr id="24" name="Text 22"/>
+          <p:cNvSpPr txBox="1"/>
+          <p:nvPr/>
+        </p:nvSpPr>
+        <p:spPr>
+          <a:xfrm>
+            <a:off x="7571232" y="5468112"/>
+            <a:ext cx="2651760" cy="402336"/>
+          </a:xfrm>
+          <a:prstGeom prst="rect">
+            <a:avLst/>
+          </a:prstGeom>
+          <a:noFill/>
+          <a:ln/>
+        </p:spPr>
+        <p:txBody>
+          <a:bodyPr wrap="square" lIns="0" tIns="0" rIns="0" bIns="0" rtlCol="0" anchor="ctr"/>
+          <a:lstStyle/>
+          <a:p>
+            <a:pPr algn="ctr" indent="0" marL="0">
+              <a:buNone/>
+            </a:pPr>
+            <a:r>
+              <a:rPr lang="en-US" sz="1200" dirty="0">
+                <a:solidFill>
+                  <a:srgbClr val="2D63FF"/>
+                </a:solidFill>
+                <a:latin typeface="IBM Plex Sans" pitchFamily="34" charset="0"/>
+                <a:ea typeface="IBM Plex Sans" pitchFamily="34" charset="-122"/>
+                <a:cs typeface="IBM Plex Sans" pitchFamily="34" charset="-120"/>
+              </a:rPr>
               <a:t>Defragmentation</a:t>
+            </a:r>
+            <a:endParaRPr lang="en-US" sz="1200" dirty="0"/>
+          </a:p>
+        </p:txBody>
+      </p:sp>
+      <p:sp>
+        <p:nvSpPr>
+          <p:cNvPr id="25" name="Shape 23"/>
+          <p:cNvSpPr/>
+          <p:nvPr/>
+        </p:nvSpPr>
+        <p:spPr>
+          <a:xfrm>
+            <a:off x="10351008" y="5468112"/>
+            <a:ext cx="1188720" cy="402336"/>
+          </a:xfrm>
+          <a:prstGeom prst="roundRect">
+            <a:avLst>
+              <a:gd name="adj" fmla="val 50000"/>
+            </a:avLst>
+          </a:prstGeom>
+          <a:solidFill>
+            <a:srgbClr val="FFFFFF"/>
+          </a:solidFill>
+          <a:ln w="12700">
+            <a:solidFill>
+              <a:srgbClr val="2D63FF"/>
+            </a:solidFill>
+            <a:prstDash val="solid"/>
+          </a:ln>
+        </p:spPr>
+      </p:sp>
+      <p:sp>
+        <p:nvSpPr>
+          <p:cNvPr id="26" name="Text 24"/>
+          <p:cNvSpPr txBox="1"/>
+          <p:nvPr/>
+        </p:nvSpPr>
+        <p:spPr>
+          <a:xfrm>
+            <a:off x="10351008" y="5468112"/>
+            <a:ext cx="1188720" cy="402336"/>
+          </a:xfrm>
+          <a:prstGeom prst="rect">
+            <a:avLst/>
+          </a:prstGeom>
+          <a:noFill/>
+          <a:ln/>
+        </p:spPr>
+        <p:txBody>
+          <a:bodyPr wrap="square" lIns="0" tIns="0" rIns="0" bIns="0" rtlCol="0" anchor="ctr"/>
+          <a:lstStyle/>
+          <a:p>
+            <a:pPr algn="ctr" indent="0" marL="0">
+              <a:buNone/>
+            </a:pPr>
+            <a:r>
+              <a:rPr lang="en-US" sz="1200" dirty="0">
+                <a:solidFill>
+                  <a:srgbClr val="2D63FF"/>
+                </a:solidFill>
+                <a:latin typeface="IBM Plex Sans" pitchFamily="34" charset="0"/>
+                <a:ea typeface="IBM Plex Sans" pitchFamily="34" charset="-122"/>
+                <a:cs typeface="IBM Plex Sans" pitchFamily="34" charset="-120"/>
+              </a:rPr>
+              <a:t>Lossy</a:t>
             </a:r>
             <a:endParaRPr lang="en-US" sz="1200" dirty="0"/>
           </a:p>

--- a/presentations/SS_L04_UtilityWorkshop_Lesson.pptx
+++ b/presentations/SS_L04_UtilityWorkshop_Lesson.pptx
@@ -19,9 +19,10 @@
     <p:sldId id="267" r:id="rId13"/>
     <p:sldId id="268" r:id="rId14"/>
     <p:sldId id="269" r:id="rId15"/>
+    <p:sldId id="270" r:id="rId16"/>
   </p:sldIdLst>
   <p:notesMasterIdLst>
-    <p:notesMasterId r:id="rId16"/>
+    <p:notesMasterId r:id="rId17"/>
   </p:notesMasterIdLst>
   <p:sldSz cx="12192000" cy="6858000"/>
   <p:notesSz cx="6858000" cy="12192000"/>
@@ -692,7 +693,13 @@
           <a:p>
             <a:r>
               <a:rPr lang="en-US" dirty="0"/>
-              <a:t>Make them commit to an answer on paper before they tap the star. Guessing first costs them the learning.</a:t>
+              <a:t>The answer is B: Losing any data would stop the program working.
+Do not say it yet. Every pupil commits first - fingers, whiteboards or a show of hands on each letter in turn - and you count the split before anyone can change their mind.
+IF MOST OF THE CLASS IS RIGHT: say why it is right in one sentence and go straight on to the independent work.
+IF A SIGNIFICANT GROUP IS ON ONE WRONG LETTER: that option is the misconception to teach against before anyone goes on. Go back to station 4, Compression, and work through its example again, aloud, with the class watching, then re-ask this question.
+The course's own response to a wrong answer here: Every byte matters in a program.
+A limitation, stated rather than papered over: one response covers every wrong option; it does not say what to revisit for each one. The course does not record what each separate wrong option means, and this slide does not invent it. Decide your own reteach for each option before the lesson; the options above are the start of it.
+This is a real activity from the experience (ss-l04-s4-c1), so the wording here is the wording a pupil will see.</a:t>
             </a:r>
             <a:endParaRPr lang="en-US" dirty="0"/>
           </a:p>
@@ -780,7 +787,7 @@
           <a:p>
             <a:r>
               <a:rPr lang="en-US" dirty="0"/>
-              <a:t>Use these as a settler, or as something for early finishers to read in the experience.</a:t>
+              <a:t>Make them commit to an answer on paper before they tap the star. Guessing first costs them the learning.</a:t>
             </a:r>
             <a:endParaRPr lang="en-US" dirty="0"/>
           </a:p>
@@ -868,7 +875,7 @@
           <a:p>
             <a:r>
               <a:rPr lang="en-US" dirty="0"/>
-              <a:t>Timed and silent. Mark against the answer sheet, then ask students to record their weakest area.</a:t>
+              <a:t>Use these as a settler, or as something for early finishers to read in the experience.</a:t>
             </a:r>
             <a:endParaRPr lang="en-US" dirty="0"/>
           </a:p>
@@ -956,7 +963,7 @@
           <a:p>
             <a:r>
               <a:rPr lang="en-US" dirty="0"/>
-              <a:t>Students copy their score-screen breakdown onto the worksheet, then rate themselves here.</a:t>
+              <a:t>Timed and silent. Mark against the answer sheet, then ask students to record their weakest area.</a:t>
             </a:r>
             <a:endParaRPr lang="en-US" dirty="0"/>
           </a:p>
@@ -980,6 +987,94 @@
             <a:fld id="{F7021451-1387-4CA6-816F-3879F97B5CBC}" type="slidenum">
               <a:rPr lang="en-US"/>
               <a:t>14</a:t>
+            </a:fld>
+            <a:endParaRPr lang="en-US"/>
+          </a:p>
+        </p:txBody>
+      </p:sp>
+    </p:spTree>
+    <p:extLst>
+      <p:ext uri="{BB962C8B-B14F-4D97-AF65-F5344CB8AC3E}">
+        <p14:creationId xmlns:p14="http://schemas.microsoft.com/office/powerpoint/2010/main" val="1024086991"/>
+      </p:ext>
+    </p:extLst>
+  </p:cSld>
+  <p:clrMapOvr>
+    <a:masterClrMapping/>
+  </p:clrMapOvr>
+</p:notes>
+</file>
+
+<file path=ppt/notesSlides/notesSlide15.xml><?xml version="1.0" encoding="utf-8"?>
+<p:notes xmlns:a="http://schemas.openxmlformats.org/drawingml/2006/main" xmlns:r="http://schemas.openxmlformats.org/officeDocument/2006/relationships" xmlns:p="http://schemas.openxmlformats.org/presentationml/2006/main">
+  <p:cSld>
+    <p:spTree>
+      <p:nvGrpSpPr>
+        <p:cNvPr id="1" name=""/>
+        <p:cNvGrpSpPr/>
+        <p:nvPr/>
+      </p:nvGrpSpPr>
+      <p:grpSpPr>
+        <a:xfrm>
+          <a:off x="0" y="0"/>
+          <a:ext cx="0" cy="0"/>
+          <a:chOff x="0" y="0"/>
+          <a:chExt cx="0" cy="0"/>
+        </a:xfrm>
+      </p:grpSpPr>
+      <p:sp>
+        <p:nvSpPr>
+          <p:cNvPr id="2" name="Slide Image Placeholder 1"/>
+          <p:cNvSpPr>
+            <a:spLocks noGrp="1" noRot="1" noChangeAspect="1"/>
+          </p:cNvSpPr>
+          <p:nvPr>
+            <p:ph type="sldImg"/>
+          </p:nvPr>
+        </p:nvSpPr>
+        <p:spPr/>
+      </p:sp>
+      <p:sp>
+        <p:nvSpPr>
+          <p:cNvPr id="3" name="Notes Placeholder 2"/>
+          <p:cNvSpPr>
+            <a:spLocks noGrp="1"/>
+          </p:cNvSpPr>
+          <p:nvPr>
+            <p:ph type="body" idx="1"/>
+          </p:nvPr>
+        </p:nvSpPr>
+        <p:spPr/>
+        <p:txBody>
+          <a:bodyPr/>
+          <a:lstStyle/>
+          <a:p>
+            <a:r>
+              <a:rPr lang="en-US" dirty="0"/>
+              <a:t>Students copy their score-screen breakdown onto the worksheet, then rate themselves here.</a:t>
+            </a:r>
+            <a:endParaRPr lang="en-US" dirty="0"/>
+          </a:p>
+        </p:txBody>
+      </p:sp>
+      <p:sp>
+        <p:nvSpPr>
+          <p:cNvPr id="4" name="Slide Number Placeholder 3"/>
+          <p:cNvSpPr>
+            <a:spLocks noGrp="1"/>
+          </p:cNvSpPr>
+          <p:nvPr>
+            <p:ph type="sldNum" sz="quarter" idx="10"/>
+          </p:nvPr>
+        </p:nvSpPr>
+        <p:spPr/>
+        <p:txBody>
+          <a:bodyPr/>
+          <a:lstStyle/>
+          <a:p>
+            <a:fld id="{F7021451-1387-4CA6-816F-3879F97B5CBC}" type="slidenum">
+              <a:rPr lang="en-US"/>
+              <a:t>15</a:t>
             </a:fld>
             <a:endParaRPr lang="en-US"/>
           </a:p>
@@ -2925,12 +3020,12 @@
         </p:nvSpPr>
         <p:spPr>
           <a:xfrm>
-            <a:off x="502920" y="438912"/>
-            <a:ext cx="3108960" cy="502920"/>
+            <a:off x="502920" y="457200"/>
+            <a:ext cx="1051560" cy="420624"/>
           </a:xfrm>
           <a:prstGeom prst="roundRect">
             <a:avLst>
-              <a:gd name="adj" fmla="val 18182"/>
+              <a:gd name="adj" fmla="val 21739"/>
             </a:avLst>
           </a:prstGeom>
           <a:solidFill>
@@ -2947,8 +3042,8 @@
         </p:nvSpPr>
         <p:spPr>
           <a:xfrm>
-            <a:off x="502920" y="438912"/>
-            <a:ext cx="3108960" cy="502920"/>
+            <a:off x="502920" y="457200"/>
+            <a:ext cx="1051560" cy="420624"/>
           </a:xfrm>
           <a:prstGeom prst="rect">
             <a:avLst/>
@@ -2964,7 +3059,7 @@
               <a:buNone/>
             </a:pPr>
             <a:r>
-              <a:rPr lang="en-US" sz="1300" b="1" dirty="0">
+              <a:rPr lang="en-US" sz="1200" b="1" dirty="0">
                 <a:solidFill>
                   <a:srgbClr val="101828"/>
                 </a:solidFill>
@@ -2972,9 +3067,9 @@
                 <a:ea typeface="IBM Plex Mono" pitchFamily="34" charset="-122"/>
                 <a:cs typeface="IBM Plex Mono" pitchFamily="34" charset="-120"/>
               </a:rPr>
-              <a:t>★  FINAL CHALLENGE</a:t>
-            </a:r>
-            <a:endParaRPr lang="en-US" sz="1300" dirty="0"/>
+              <a:t>CHECK</a:t>
+            </a:r>
+            <a:endParaRPr lang="en-US" sz="1200" dirty="0"/>
           </a:p>
         </p:txBody>
       </p:sp>
@@ -2986,8 +3081,8 @@
         </p:nvSpPr>
         <p:spPr>
           <a:xfrm>
-            <a:off x="502920" y="1097280"/>
-            <a:ext cx="11155680" cy="731520"/>
+            <a:off x="1737360" y="457200"/>
+            <a:ext cx="9875520" cy="420624"/>
           </a:xfrm>
           <a:prstGeom prst="rect">
             <a:avLst/>
@@ -3003,34 +3098,76 @@
               <a:buNone/>
             </a:pPr>
             <a:r>
-              <a:rPr lang="en-US" sz="3400" b="1" dirty="0">
-                <a:solidFill>
-                  <a:srgbClr val="101828"/>
+              <a:rPr lang="en-US" sz="1500" dirty="0">
+                <a:solidFill>
+                  <a:srgbClr val="667085"/>
                 </a:solidFill>
                 <a:latin typeface="IBM Plex Sans" pitchFamily="34" charset="0"/>
                 <a:ea typeface="IBM Plex Sans" pitchFamily="34" charset="-122"/>
                 <a:cs typeface="IBM Plex Sans" pitchFamily="34" charset="-120"/>
               </a:rPr>
-              <a:t>Service the machine</a:t>
-            </a:r>
-            <a:endParaRPr lang="en-US" sz="3400" dirty="0"/>
-          </a:p>
-        </p:txBody>
-      </p:sp>
-      <p:sp>
-        <p:nvSpPr>
-          <p:cNvPr id="8" name="Shape 6"/>
+              <a:t>Hands down. Everyone commits.</a:t>
+            </a:r>
+            <a:endParaRPr lang="en-US" sz="1500" dirty="0"/>
+          </a:p>
+        </p:txBody>
+      </p:sp>
+      <p:sp>
+        <p:nvSpPr>
+          <p:cNvPr id="8" name="Text 6"/>
+          <p:cNvSpPr txBox="1"/>
+          <p:nvPr/>
+        </p:nvSpPr>
+        <p:spPr>
+          <a:xfrm>
+            <a:off x="502920" y="1097280"/>
+            <a:ext cx="11155680" cy="914400"/>
+          </a:xfrm>
+          <a:prstGeom prst="rect">
+            <a:avLst/>
+          </a:prstGeom>
+          <a:noFill/>
+          <a:ln/>
+        </p:spPr>
+        <p:txBody>
+          <a:bodyPr wrap="square" lIns="0" tIns="0" rIns="0" bIns="0" rtlCol="0" anchor="ctr"/>
+          <a:lstStyle/>
+          <a:p>
+            <a:pPr indent="0" marL="0">
+              <a:lnSpc>
+                <a:spcPct val="115000"/>
+              </a:lnSpc>
+              <a:buNone/>
+            </a:pPr>
+            <a:r>
+              <a:rPr lang="en-US" sz="2600" b="1" dirty="0">
+                <a:solidFill>
+                  <a:srgbClr val="101828"/>
+                </a:solidFill>
+                <a:latin typeface="IBM Plex Sans" pitchFamily="34" charset="0"/>
+                <a:ea typeface="IBM Plex Sans" pitchFamily="34" charset="-122"/>
+                <a:cs typeface="IBM Plex Sans" pitchFamily="34" charset="-120"/>
+              </a:rPr>
+              <a:t>Why must a program file be compressed losslessly?</a:t>
+            </a:r>
+            <a:endParaRPr lang="en-US" sz="2600" dirty="0"/>
+          </a:p>
+        </p:txBody>
+      </p:sp>
+      <p:sp>
+        <p:nvSpPr>
+          <p:cNvPr id="9" name="Shape 7"/>
           <p:cNvSpPr/>
           <p:nvPr/>
         </p:nvSpPr>
         <p:spPr>
           <a:xfrm>
-            <a:off x="502920" y="2011680"/>
-            <a:ext cx="11155680" cy="2194560"/>
+            <a:off x="502920" y="2148840"/>
+            <a:ext cx="11155680" cy="731520"/>
           </a:xfrm>
           <a:prstGeom prst="roundRect">
             <a:avLst>
-              <a:gd name="adj" fmla="val 5000"/>
+              <a:gd name="adj" fmla="val 15000"/>
             </a:avLst>
           </a:prstGeom>
           <a:solidFill>
@@ -3038,7 +3175,7 @@
           </a:solidFill>
           <a:ln w="15875">
             <a:solidFill>
-              <a:srgbClr val="2D63FF"/>
+              <a:srgbClr val="D9DEE7"/>
             </a:solidFill>
             <a:prstDash val="solid"/>
           </a:ln>
@@ -3046,14 +3183,75 @@
       </p:sp>
       <p:sp>
         <p:nvSpPr>
-          <p:cNvPr id="9" name="Text 7"/>
-          <p:cNvSpPr txBox="1"/>
-          <p:nvPr/>
-        </p:nvSpPr>
-        <p:spPr>
-          <a:xfrm>
-            <a:off x="1005840" y="2331720"/>
-            <a:ext cx="10149840" cy="1554480"/>
+          <p:cNvPr id="10" name="Shape 8"/>
+          <p:cNvSpPr/>
+          <p:nvPr/>
+        </p:nvSpPr>
+        <p:spPr>
+          <a:xfrm>
+            <a:off x="777240" y="2295144"/>
+            <a:ext cx="438912" cy="438912"/>
+          </a:xfrm>
+          <a:prstGeom prst="roundRect">
+            <a:avLst>
+              <a:gd name="adj" fmla="val 20833"/>
+            </a:avLst>
+          </a:prstGeom>
+          <a:solidFill>
+            <a:srgbClr val="EEF2FB"/>
+          </a:solidFill>
+          <a:ln/>
+        </p:spPr>
+      </p:sp>
+      <p:sp>
+        <p:nvSpPr>
+          <p:cNvPr id="11" name="Text 9"/>
+          <p:cNvSpPr txBox="1"/>
+          <p:nvPr/>
+        </p:nvSpPr>
+        <p:spPr>
+          <a:xfrm>
+            <a:off x="777240" y="2295144"/>
+            <a:ext cx="438912" cy="438912"/>
+          </a:xfrm>
+          <a:prstGeom prst="rect">
+            <a:avLst/>
+          </a:prstGeom>
+          <a:noFill/>
+          <a:ln/>
+        </p:spPr>
+        <p:txBody>
+          <a:bodyPr wrap="square" lIns="0" tIns="0" rIns="0" bIns="0" rtlCol="0" anchor="ctr"/>
+          <a:lstStyle/>
+          <a:p>
+            <a:pPr algn="ctr" indent="0" marL="0">
+              <a:buNone/>
+            </a:pPr>
+            <a:r>
+              <a:rPr lang="en-US" sz="1300" b="1" dirty="0">
+                <a:solidFill>
+                  <a:srgbClr val="2D63FF"/>
+                </a:solidFill>
+                <a:latin typeface="IBM Plex Mono" pitchFamily="34" charset="0"/>
+                <a:ea typeface="IBM Plex Mono" pitchFamily="34" charset="-122"/>
+                <a:cs typeface="IBM Plex Mono" pitchFamily="34" charset="-120"/>
+              </a:rPr>
+              <a:t>A</a:t>
+            </a:r>
+            <a:endParaRPr lang="en-US" sz="1300" dirty="0"/>
+          </a:p>
+        </p:txBody>
+      </p:sp>
+      <p:sp>
+        <p:nvSpPr>
+          <p:cNvPr id="12" name="Text 10"/>
+          <p:cNvSpPr txBox="1"/>
+          <p:nvPr/>
+        </p:nvSpPr>
+        <p:spPr>
+          <a:xfrm>
+            <a:off x="1417320" y="2148840"/>
+            <a:ext cx="10058400" cy="731520"/>
           </a:xfrm>
           <a:prstGeom prst="rect">
             <a:avLst/>
@@ -3067,12 +3265,12 @@
           <a:p>
             <a:pPr indent="0" marL="0">
               <a:lnSpc>
-                <a:spcPct val="130000"/>
+                <a:spcPct val="115000"/>
               </a:lnSpc>
               <a:buNone/>
             </a:pPr>
             <a:r>
-              <a:rPr lang="en-US" sz="2200" dirty="0">
+              <a:rPr lang="en-US" sz="1700" dirty="0">
                 <a:solidFill>
                   <a:srgbClr val="101828"/>
                 </a:solidFill>
@@ -3080,22 +3278,110 @@
                 <a:ea typeface="IBM Plex Sans" pitchFamily="34" charset="-122"/>
                 <a:cs typeface="IBM Plex Sans" pitchFamily="34" charset="-120"/>
               </a:rPr>
-              <a:t>One disk to tidy, then decide which utility each situation needs. Tap the star to begin.</a:t>
-            </a:r>
-            <a:endParaRPr lang="en-US" sz="2200" dirty="0"/>
-          </a:p>
-        </p:txBody>
-      </p:sp>
-      <p:sp>
-        <p:nvSpPr>
-          <p:cNvPr id="10" name="Text 8"/>
-          <p:cNvSpPr txBox="1"/>
-          <p:nvPr/>
-        </p:nvSpPr>
-        <p:spPr>
-          <a:xfrm>
-            <a:off x="502920" y="4526280"/>
-            <a:ext cx="11155680" cy="457200"/>
+              <a:t>Programs have no patterns</a:t>
+            </a:r>
+            <a:endParaRPr lang="en-US" sz="1700" dirty="0"/>
+          </a:p>
+        </p:txBody>
+      </p:sp>
+      <p:sp>
+        <p:nvSpPr>
+          <p:cNvPr id="13" name="Shape 11"/>
+          <p:cNvSpPr/>
+          <p:nvPr/>
+        </p:nvSpPr>
+        <p:spPr>
+          <a:xfrm>
+            <a:off x="502920" y="3017520"/>
+            <a:ext cx="11155680" cy="731520"/>
+          </a:xfrm>
+          <a:prstGeom prst="roundRect">
+            <a:avLst>
+              <a:gd name="adj" fmla="val 15000"/>
+            </a:avLst>
+          </a:prstGeom>
+          <a:solidFill>
+            <a:srgbClr val="FFFFFF"/>
+          </a:solidFill>
+          <a:ln w="15875">
+            <a:solidFill>
+              <a:srgbClr val="D9DEE7"/>
+            </a:solidFill>
+            <a:prstDash val="solid"/>
+          </a:ln>
+        </p:spPr>
+      </p:sp>
+      <p:sp>
+        <p:nvSpPr>
+          <p:cNvPr id="14" name="Shape 12"/>
+          <p:cNvSpPr/>
+          <p:nvPr/>
+        </p:nvSpPr>
+        <p:spPr>
+          <a:xfrm>
+            <a:off x="777240" y="3163824"/>
+            <a:ext cx="438912" cy="438912"/>
+          </a:xfrm>
+          <a:prstGeom prst="roundRect">
+            <a:avLst>
+              <a:gd name="adj" fmla="val 20833"/>
+            </a:avLst>
+          </a:prstGeom>
+          <a:solidFill>
+            <a:srgbClr val="EEF2FB"/>
+          </a:solidFill>
+          <a:ln/>
+        </p:spPr>
+      </p:sp>
+      <p:sp>
+        <p:nvSpPr>
+          <p:cNvPr id="15" name="Text 13"/>
+          <p:cNvSpPr txBox="1"/>
+          <p:nvPr/>
+        </p:nvSpPr>
+        <p:spPr>
+          <a:xfrm>
+            <a:off x="777240" y="3163824"/>
+            <a:ext cx="438912" cy="438912"/>
+          </a:xfrm>
+          <a:prstGeom prst="rect">
+            <a:avLst/>
+          </a:prstGeom>
+          <a:noFill/>
+          <a:ln/>
+        </p:spPr>
+        <p:txBody>
+          <a:bodyPr wrap="square" lIns="0" tIns="0" rIns="0" bIns="0" rtlCol="0" anchor="ctr"/>
+          <a:lstStyle/>
+          <a:p>
+            <a:pPr algn="ctr" indent="0" marL="0">
+              <a:buNone/>
+            </a:pPr>
+            <a:r>
+              <a:rPr lang="en-US" sz="1300" b="1" dirty="0">
+                <a:solidFill>
+                  <a:srgbClr val="2D63FF"/>
+                </a:solidFill>
+                <a:latin typeface="IBM Plex Mono" pitchFamily="34" charset="0"/>
+                <a:ea typeface="IBM Plex Mono" pitchFamily="34" charset="-122"/>
+                <a:cs typeface="IBM Plex Mono" pitchFamily="34" charset="-120"/>
+              </a:rPr>
+              <a:t>B</a:t>
+            </a:r>
+            <a:endParaRPr lang="en-US" sz="1300" dirty="0"/>
+          </a:p>
+        </p:txBody>
+      </p:sp>
+      <p:sp>
+        <p:nvSpPr>
+          <p:cNvPr id="16" name="Text 14"/>
+          <p:cNvSpPr txBox="1"/>
+          <p:nvPr/>
+        </p:nvSpPr>
+        <p:spPr>
+          <a:xfrm>
+            <a:off x="1417320" y="3017520"/>
+            <a:ext cx="10058400" cy="731520"/>
           </a:xfrm>
           <a:prstGeom prst="rect">
             <a:avLst/>
@@ -3108,20 +3394,283 @@
           <a:lstStyle/>
           <a:p>
             <a:pPr indent="0" marL="0">
-              <a:buNone/>
-            </a:pPr>
-            <a:r>
-              <a:rPr lang="en-US" sz="1600" dirty="0">
-                <a:solidFill>
-                  <a:srgbClr val="667085"/>
+              <a:lnSpc>
+                <a:spcPct val="115000"/>
+              </a:lnSpc>
+              <a:buNone/>
+            </a:pPr>
+            <a:r>
+              <a:rPr lang="en-US" sz="1700" dirty="0">
+                <a:solidFill>
+                  <a:srgbClr val="101828"/>
                 </a:solidFill>
                 <a:latin typeface="IBM Plex Sans" pitchFamily="34" charset="0"/>
                 <a:ea typeface="IBM Plex Sans" pitchFamily="34" charset="-122"/>
                 <a:cs typeface="IBM Plex Sans" pitchFamily="34" charset="-120"/>
               </a:rPr>
-              <a:t>Predict on paper first, then look down and test it.</a:t>
-            </a:r>
-            <a:endParaRPr lang="en-US" sz="1600" dirty="0"/>
+              <a:t>Losing any data would stop the program working</a:t>
+            </a:r>
+            <a:endParaRPr lang="en-US" sz="1700" dirty="0"/>
+          </a:p>
+        </p:txBody>
+      </p:sp>
+      <p:sp>
+        <p:nvSpPr>
+          <p:cNvPr id="17" name="Shape 15"/>
+          <p:cNvSpPr/>
+          <p:nvPr/>
+        </p:nvSpPr>
+        <p:spPr>
+          <a:xfrm>
+            <a:off x="502920" y="3886200"/>
+            <a:ext cx="11155680" cy="731520"/>
+          </a:xfrm>
+          <a:prstGeom prst="roundRect">
+            <a:avLst>
+              <a:gd name="adj" fmla="val 15000"/>
+            </a:avLst>
+          </a:prstGeom>
+          <a:solidFill>
+            <a:srgbClr val="FFFFFF"/>
+          </a:solidFill>
+          <a:ln w="15875">
+            <a:solidFill>
+              <a:srgbClr val="D9DEE7"/>
+            </a:solidFill>
+            <a:prstDash val="solid"/>
+          </a:ln>
+        </p:spPr>
+      </p:sp>
+      <p:sp>
+        <p:nvSpPr>
+          <p:cNvPr id="18" name="Shape 16"/>
+          <p:cNvSpPr/>
+          <p:nvPr/>
+        </p:nvSpPr>
+        <p:spPr>
+          <a:xfrm>
+            <a:off x="777240" y="4032504"/>
+            <a:ext cx="438912" cy="438912"/>
+          </a:xfrm>
+          <a:prstGeom prst="roundRect">
+            <a:avLst>
+              <a:gd name="adj" fmla="val 20833"/>
+            </a:avLst>
+          </a:prstGeom>
+          <a:solidFill>
+            <a:srgbClr val="EEF2FB"/>
+          </a:solidFill>
+          <a:ln/>
+        </p:spPr>
+      </p:sp>
+      <p:sp>
+        <p:nvSpPr>
+          <p:cNvPr id="19" name="Text 17"/>
+          <p:cNvSpPr txBox="1"/>
+          <p:nvPr/>
+        </p:nvSpPr>
+        <p:spPr>
+          <a:xfrm>
+            <a:off x="777240" y="4032504"/>
+            <a:ext cx="438912" cy="438912"/>
+          </a:xfrm>
+          <a:prstGeom prst="rect">
+            <a:avLst/>
+          </a:prstGeom>
+          <a:noFill/>
+          <a:ln/>
+        </p:spPr>
+        <p:txBody>
+          <a:bodyPr wrap="square" lIns="0" tIns="0" rIns="0" bIns="0" rtlCol="0" anchor="ctr"/>
+          <a:lstStyle/>
+          <a:p>
+            <a:pPr algn="ctr" indent="0" marL="0">
+              <a:buNone/>
+            </a:pPr>
+            <a:r>
+              <a:rPr lang="en-US" sz="1300" b="1" dirty="0">
+                <a:solidFill>
+                  <a:srgbClr val="2D63FF"/>
+                </a:solidFill>
+                <a:latin typeface="IBM Plex Mono" pitchFamily="34" charset="0"/>
+                <a:ea typeface="IBM Plex Mono" pitchFamily="34" charset="-122"/>
+                <a:cs typeface="IBM Plex Mono" pitchFamily="34" charset="-120"/>
+              </a:rPr>
+              <a:t>C</a:t>
+            </a:r>
+            <a:endParaRPr lang="en-US" sz="1300" dirty="0"/>
+          </a:p>
+        </p:txBody>
+      </p:sp>
+      <p:sp>
+        <p:nvSpPr>
+          <p:cNvPr id="20" name="Text 18"/>
+          <p:cNvSpPr txBox="1"/>
+          <p:nvPr/>
+        </p:nvSpPr>
+        <p:spPr>
+          <a:xfrm>
+            <a:off x="1417320" y="3886200"/>
+            <a:ext cx="10058400" cy="731520"/>
+          </a:xfrm>
+          <a:prstGeom prst="rect">
+            <a:avLst/>
+          </a:prstGeom>
+          <a:noFill/>
+          <a:ln/>
+        </p:spPr>
+        <p:txBody>
+          <a:bodyPr wrap="square" lIns="0" tIns="0" rIns="0" bIns="0" rtlCol="0" anchor="ctr"/>
+          <a:lstStyle/>
+          <a:p>
+            <a:pPr indent="0" marL="0">
+              <a:lnSpc>
+                <a:spcPct val="115000"/>
+              </a:lnSpc>
+              <a:buNone/>
+            </a:pPr>
+            <a:r>
+              <a:rPr lang="en-US" sz="1700" dirty="0">
+                <a:solidFill>
+                  <a:srgbClr val="101828"/>
+                </a:solidFill>
+                <a:latin typeface="IBM Plex Sans" pitchFamily="34" charset="0"/>
+                <a:ea typeface="IBM Plex Sans" pitchFamily="34" charset="-122"/>
+                <a:cs typeface="IBM Plex Sans" pitchFamily="34" charset="-120"/>
+              </a:rPr>
+              <a:t>Programs are too small to compress</a:t>
+            </a:r>
+            <a:endParaRPr lang="en-US" sz="1700" dirty="0"/>
+          </a:p>
+        </p:txBody>
+      </p:sp>
+      <p:sp>
+        <p:nvSpPr>
+          <p:cNvPr id="21" name="Shape 19"/>
+          <p:cNvSpPr/>
+          <p:nvPr/>
+        </p:nvSpPr>
+        <p:spPr>
+          <a:xfrm>
+            <a:off x="502920" y="4754880"/>
+            <a:ext cx="11155680" cy="731520"/>
+          </a:xfrm>
+          <a:prstGeom prst="roundRect">
+            <a:avLst>
+              <a:gd name="adj" fmla="val 15000"/>
+            </a:avLst>
+          </a:prstGeom>
+          <a:solidFill>
+            <a:srgbClr val="FFFFFF"/>
+          </a:solidFill>
+          <a:ln w="15875">
+            <a:solidFill>
+              <a:srgbClr val="D9DEE7"/>
+            </a:solidFill>
+            <a:prstDash val="solid"/>
+          </a:ln>
+        </p:spPr>
+      </p:sp>
+      <p:sp>
+        <p:nvSpPr>
+          <p:cNvPr id="22" name="Shape 20"/>
+          <p:cNvSpPr/>
+          <p:nvPr/>
+        </p:nvSpPr>
+        <p:spPr>
+          <a:xfrm>
+            <a:off x="777240" y="4901184"/>
+            <a:ext cx="438912" cy="438912"/>
+          </a:xfrm>
+          <a:prstGeom prst="roundRect">
+            <a:avLst>
+              <a:gd name="adj" fmla="val 20833"/>
+            </a:avLst>
+          </a:prstGeom>
+          <a:solidFill>
+            <a:srgbClr val="EEF2FB"/>
+          </a:solidFill>
+          <a:ln/>
+        </p:spPr>
+      </p:sp>
+      <p:sp>
+        <p:nvSpPr>
+          <p:cNvPr id="23" name="Text 21"/>
+          <p:cNvSpPr txBox="1"/>
+          <p:nvPr/>
+        </p:nvSpPr>
+        <p:spPr>
+          <a:xfrm>
+            <a:off x="777240" y="4901184"/>
+            <a:ext cx="438912" cy="438912"/>
+          </a:xfrm>
+          <a:prstGeom prst="rect">
+            <a:avLst/>
+          </a:prstGeom>
+          <a:noFill/>
+          <a:ln/>
+        </p:spPr>
+        <p:txBody>
+          <a:bodyPr wrap="square" lIns="0" tIns="0" rIns="0" bIns="0" rtlCol="0" anchor="ctr"/>
+          <a:lstStyle/>
+          <a:p>
+            <a:pPr algn="ctr" indent="0" marL="0">
+              <a:buNone/>
+            </a:pPr>
+            <a:r>
+              <a:rPr lang="en-US" sz="1300" b="1" dirty="0">
+                <a:solidFill>
+                  <a:srgbClr val="2D63FF"/>
+                </a:solidFill>
+                <a:latin typeface="IBM Plex Mono" pitchFamily="34" charset="0"/>
+                <a:ea typeface="IBM Plex Mono" pitchFamily="34" charset="-122"/>
+                <a:cs typeface="IBM Plex Mono" pitchFamily="34" charset="-120"/>
+              </a:rPr>
+              <a:t>D</a:t>
+            </a:r>
+            <a:endParaRPr lang="en-US" sz="1300" dirty="0"/>
+          </a:p>
+        </p:txBody>
+      </p:sp>
+      <p:sp>
+        <p:nvSpPr>
+          <p:cNvPr id="24" name="Text 22"/>
+          <p:cNvSpPr txBox="1"/>
+          <p:nvPr/>
+        </p:nvSpPr>
+        <p:spPr>
+          <a:xfrm>
+            <a:off x="1417320" y="4754880"/>
+            <a:ext cx="10058400" cy="731520"/>
+          </a:xfrm>
+          <a:prstGeom prst="rect">
+            <a:avLst/>
+          </a:prstGeom>
+          <a:noFill/>
+          <a:ln/>
+        </p:spPr>
+        <p:txBody>
+          <a:bodyPr wrap="square" lIns="0" tIns="0" rIns="0" bIns="0" rtlCol="0" anchor="ctr"/>
+          <a:lstStyle/>
+          <a:p>
+            <a:pPr indent="0" marL="0">
+              <a:lnSpc>
+                <a:spcPct val="115000"/>
+              </a:lnSpc>
+              <a:buNone/>
+            </a:pPr>
+            <a:r>
+              <a:rPr lang="en-US" sz="1700" dirty="0">
+                <a:solidFill>
+                  <a:srgbClr val="101828"/>
+                </a:solidFill>
+                <a:latin typeface="IBM Plex Sans" pitchFamily="34" charset="0"/>
+                <a:ea typeface="IBM Plex Sans" pitchFamily="34" charset="-122"/>
+                <a:cs typeface="IBM Plex Sans" pitchFamily="34" charset="-120"/>
+              </a:rPr>
+              <a:t>Lossy compression is illegal</a:t>
+            </a:r>
+            <a:endParaRPr lang="en-US" sz="1700" dirty="0"/>
           </a:p>
         </p:txBody>
       </p:sp>
@@ -3257,14 +3806,75 @@
       </p:sp>
       <p:sp>
         <p:nvSpPr>
-          <p:cNvPr id="5" name="Text 3"/>
-          <p:cNvSpPr txBox="1"/>
-          <p:nvPr/>
-        </p:nvSpPr>
-        <p:spPr>
-          <a:xfrm>
-            <a:off x="502920" y="411480"/>
-            <a:ext cx="11155680" cy="777240"/>
+          <p:cNvPr id="5" name="Shape 3"/>
+          <p:cNvSpPr/>
+          <p:nvPr/>
+        </p:nvSpPr>
+        <p:spPr>
+          <a:xfrm>
+            <a:off x="502920" y="438912"/>
+            <a:ext cx="3108960" cy="502920"/>
+          </a:xfrm>
+          <a:prstGeom prst="roundRect">
+            <a:avLst>
+              <a:gd name="adj" fmla="val 18182"/>
+            </a:avLst>
+          </a:prstGeom>
+          <a:solidFill>
+            <a:srgbClr val="F4B942"/>
+          </a:solidFill>
+          <a:ln/>
+        </p:spPr>
+      </p:sp>
+      <p:sp>
+        <p:nvSpPr>
+          <p:cNvPr id="6" name="Text 4"/>
+          <p:cNvSpPr txBox="1"/>
+          <p:nvPr/>
+        </p:nvSpPr>
+        <p:spPr>
+          <a:xfrm>
+            <a:off x="502920" y="438912"/>
+            <a:ext cx="3108960" cy="502920"/>
+          </a:xfrm>
+          <a:prstGeom prst="rect">
+            <a:avLst/>
+          </a:prstGeom>
+          <a:noFill/>
+          <a:ln/>
+        </p:spPr>
+        <p:txBody>
+          <a:bodyPr wrap="square" lIns="0" tIns="0" rIns="0" bIns="0" rtlCol="0" anchor="ctr"/>
+          <a:lstStyle/>
+          <a:p>
+            <a:pPr algn="ctr" indent="0" marL="0">
+              <a:buNone/>
+            </a:pPr>
+            <a:r>
+              <a:rPr lang="en-US" sz="1300" b="1" dirty="0">
+                <a:solidFill>
+                  <a:srgbClr val="101828"/>
+                </a:solidFill>
+                <a:latin typeface="IBM Plex Mono" pitchFamily="34" charset="0"/>
+                <a:ea typeface="IBM Plex Mono" pitchFamily="34" charset="-122"/>
+                <a:cs typeface="IBM Plex Mono" pitchFamily="34" charset="-120"/>
+              </a:rPr>
+              <a:t>★  FINAL CHALLENGE</a:t>
+            </a:r>
+            <a:endParaRPr lang="en-US" sz="1300" dirty="0"/>
+          </a:p>
+        </p:txBody>
+      </p:sp>
+      <p:sp>
+        <p:nvSpPr>
+          <p:cNvPr id="7" name="Text 5"/>
+          <p:cNvSpPr txBox="1"/>
+          <p:nvPr/>
+        </p:nvSpPr>
+        <p:spPr>
+          <a:xfrm>
+            <a:off x="502920" y="1097280"/>
+            <a:ext cx="11155680" cy="731520"/>
           </a:xfrm>
           <a:prstGeom prst="rect">
             <a:avLst/>
@@ -3280,7 +3890,7 @@
               <a:buNone/>
             </a:pPr>
             <a:r>
-              <a:rPr lang="en-US" sz="3200" b="1" dirty="0">
+              <a:rPr lang="en-US" sz="3400" b="1" dirty="0">
                 <a:solidFill>
                   <a:srgbClr val="101828"/>
                 </a:solidFill>
@@ -3288,65 +3898,26 @@
                 <a:ea typeface="IBM Plex Sans" pitchFamily="34" charset="-122"/>
                 <a:cs typeface="IBM Plex Sans" pitchFamily="34" charset="-120"/>
               </a:rPr>
-              <a:t>Worth knowing</a:t>
-            </a:r>
-            <a:endParaRPr lang="en-US" sz="3200" dirty="0"/>
-          </a:p>
-        </p:txBody>
-      </p:sp>
-      <p:sp>
-        <p:nvSpPr>
-          <p:cNvPr id="6" name="Text 4"/>
-          <p:cNvSpPr txBox="1"/>
-          <p:nvPr/>
-        </p:nvSpPr>
-        <p:spPr>
-          <a:xfrm>
-            <a:off x="502920" y="1170432"/>
-            <a:ext cx="11155680" cy="411480"/>
-          </a:xfrm>
-          <a:prstGeom prst="rect">
-            <a:avLst/>
-          </a:prstGeom>
-          <a:noFill/>
-          <a:ln/>
-        </p:spPr>
-        <p:txBody>
-          <a:bodyPr wrap="square" lIns="0" tIns="0" rIns="0" bIns="0" rtlCol="0" anchor="ctr"/>
-          <a:lstStyle/>
-          <a:p>
-            <a:pPr indent="0" marL="0">
-              <a:buNone/>
-            </a:pPr>
-            <a:r>
-              <a:rPr lang="en-US" sz="1500" dirty="0">
-                <a:solidFill>
-                  <a:srgbClr val="667085"/>
-                </a:solidFill>
-                <a:latin typeface="IBM Plex Sans" pitchFamily="34" charset="0"/>
-                <a:ea typeface="IBM Plex Sans" pitchFamily="34" charset="-122"/>
-                <a:cs typeface="IBM Plex Sans" pitchFamily="34" charset="-120"/>
-              </a:rPr>
-              <a:t>The information markers dotted around the room</a:t>
-            </a:r>
-            <a:endParaRPr lang="en-US" sz="1500" dirty="0"/>
-          </a:p>
-        </p:txBody>
-      </p:sp>
-      <p:sp>
-        <p:nvSpPr>
-          <p:cNvPr id="7" name="Shape 5"/>
+              <a:t>Service the machine</a:t>
+            </a:r>
+            <a:endParaRPr lang="en-US" sz="3400" dirty="0"/>
+          </a:p>
+        </p:txBody>
+      </p:sp>
+      <p:sp>
+        <p:nvSpPr>
+          <p:cNvPr id="8" name="Shape 6"/>
           <p:cNvSpPr/>
           <p:nvPr/>
         </p:nvSpPr>
         <p:spPr>
           <a:xfrm>
-            <a:off x="502920" y="1828800"/>
-            <a:ext cx="5394960" cy="1737360"/>
+            <a:off x="502920" y="2011680"/>
+            <a:ext cx="11155680" cy="2194560"/>
           </a:xfrm>
           <a:prstGeom prst="roundRect">
             <a:avLst>
-              <a:gd name="adj" fmla="val 6316"/>
+              <a:gd name="adj" fmla="val 5000"/>
             </a:avLst>
           </a:prstGeom>
           <a:solidFill>
@@ -3362,14 +3933,14 @@
       </p:sp>
       <p:sp>
         <p:nvSpPr>
-          <p:cNvPr id="8" name="Text 6"/>
-          <p:cNvSpPr txBox="1"/>
-          <p:nvPr/>
-        </p:nvSpPr>
-        <p:spPr>
-          <a:xfrm>
-            <a:off x="822960" y="2011680"/>
-            <a:ext cx="4754880" cy="365760"/>
+          <p:cNvPr id="9" name="Text 7"/>
+          <p:cNvSpPr txBox="1"/>
+          <p:nvPr/>
+        </p:nvSpPr>
+        <p:spPr>
+          <a:xfrm>
+            <a:off x="1005840" y="2331720"/>
+            <a:ext cx="10149840" cy="1554480"/>
           </a:xfrm>
           <a:prstGeom prst="rect">
             <a:avLst/>
@@ -3382,52 +3953,52 @@
           <a:lstStyle/>
           <a:p>
             <a:pPr indent="0" marL="0">
-              <a:buNone/>
-            </a:pPr>
-            <a:r>
-              <a:rPr lang="en-US" sz="1600" b="1" dirty="0">
-                <a:solidFill>
-                  <a:srgbClr val="2D63FF"/>
+              <a:lnSpc>
+                <a:spcPct val="130000"/>
+              </a:lnSpc>
+              <a:buNone/>
+            </a:pPr>
+            <a:r>
+              <a:rPr lang="en-US" sz="2200" dirty="0">
+                <a:solidFill>
+                  <a:srgbClr val="101828"/>
                 </a:solidFill>
                 <a:latin typeface="IBM Plex Sans" pitchFamily="34" charset="0"/>
                 <a:ea typeface="IBM Plex Sans" pitchFamily="34" charset="-122"/>
                 <a:cs typeface="IBM Plex Sans" pitchFamily="34" charset="-120"/>
               </a:rPr>
-              <a:t>Utilities used to be separate</a:t>
-            </a:r>
-            <a:endParaRPr lang="en-US" sz="1600" dirty="0"/>
-          </a:p>
-        </p:txBody>
-      </p:sp>
-      <p:sp>
-        <p:nvSpPr>
-          <p:cNvPr id="9" name="Text 7"/>
-          <p:cNvSpPr txBox="1"/>
-          <p:nvPr/>
-        </p:nvSpPr>
-        <p:spPr>
-          <a:xfrm>
-            <a:off x="822960" y="2395728"/>
-            <a:ext cx="4754880" cy="1005840"/>
-          </a:xfrm>
-          <a:prstGeom prst="rect">
-            <a:avLst/>
-          </a:prstGeom>
-          <a:noFill/>
-          <a:ln/>
-        </p:spPr>
-        <p:txBody>
-          <a:bodyPr wrap="square" lIns="0" tIns="0" rIns="0" bIns="0" rtlCol="0" anchor="t"/>
+              <a:t>One disk to tidy, then decide which utility each situation needs. Tap the star to begin.</a:t>
+            </a:r>
+            <a:endParaRPr lang="en-US" sz="2200" dirty="0"/>
+          </a:p>
+        </p:txBody>
+      </p:sp>
+      <p:sp>
+        <p:nvSpPr>
+          <p:cNvPr id="10" name="Text 8"/>
+          <p:cNvSpPr txBox="1"/>
+          <p:nvPr/>
+        </p:nvSpPr>
+        <p:spPr>
+          <a:xfrm>
+            <a:off x="502920" y="4526280"/>
+            <a:ext cx="11155680" cy="457200"/>
+          </a:xfrm>
+          <a:prstGeom prst="rect">
+            <a:avLst/>
+          </a:prstGeom>
+          <a:noFill/>
+          <a:ln/>
+        </p:spPr>
+        <p:txBody>
+          <a:bodyPr wrap="square" lIns="0" tIns="0" rIns="0" bIns="0" rtlCol="0" anchor="ctr"/>
           <a:lstStyle/>
           <a:p>
             <a:pPr indent="0" marL="0">
-              <a:lnSpc>
-                <a:spcPct val="120000"/>
-              </a:lnSpc>
-              <a:buNone/>
-            </a:pPr>
-            <a:r>
-              <a:rPr lang="en-US" sz="1300" dirty="0">
+              <a:buNone/>
+            </a:pPr>
+            <a:r>
+              <a:rPr lang="en-US" sz="1600" dirty="0">
                 <a:solidFill>
                   <a:srgbClr val="667085"/>
                 </a:solidFill>
@@ -3435,333 +4006,9 @@
                 <a:ea typeface="IBM Plex Sans" pitchFamily="34" charset="-122"/>
                 <a:cs typeface="IBM Plex Sans" pitchFamily="34" charset="-120"/>
               </a:rPr>
-              <a:t>Defragmenters, backup tools and antivirus were once programs you bought. Most are now built into the operating system.</a:t>
-            </a:r>
-            <a:endParaRPr lang="en-US" sz="1300" dirty="0"/>
-          </a:p>
-        </p:txBody>
-      </p:sp>
-      <p:sp>
-        <p:nvSpPr>
-          <p:cNvPr id="10" name="Shape 8"/>
-          <p:cNvSpPr/>
-          <p:nvPr/>
-        </p:nvSpPr>
-        <p:spPr>
-          <a:xfrm>
-            <a:off x="6217920" y="1828800"/>
-            <a:ext cx="5394960" cy="1737360"/>
-          </a:xfrm>
-          <a:prstGeom prst="roundRect">
-            <a:avLst>
-              <a:gd name="adj" fmla="val 6316"/>
-            </a:avLst>
-          </a:prstGeom>
-          <a:solidFill>
-            <a:srgbClr val="FFFFFF"/>
-          </a:solidFill>
-          <a:ln w="15875">
-            <a:solidFill>
-              <a:srgbClr val="08A6A6"/>
-            </a:solidFill>
-            <a:prstDash val="solid"/>
-          </a:ln>
-        </p:spPr>
-      </p:sp>
-      <p:sp>
-        <p:nvSpPr>
-          <p:cNvPr id="11" name="Text 9"/>
-          <p:cNvSpPr txBox="1"/>
-          <p:nvPr/>
-        </p:nvSpPr>
-        <p:spPr>
-          <a:xfrm>
-            <a:off x="6537960" y="2011680"/>
-            <a:ext cx="4754880" cy="365760"/>
-          </a:xfrm>
-          <a:prstGeom prst="rect">
-            <a:avLst/>
-          </a:prstGeom>
-          <a:noFill/>
-          <a:ln/>
-        </p:spPr>
-        <p:txBody>
-          <a:bodyPr wrap="square" lIns="0" tIns="0" rIns="0" bIns="0" rtlCol="0" anchor="ctr"/>
-          <a:lstStyle/>
-          <a:p>
-            <a:pPr indent="0" marL="0">
-              <a:buNone/>
-            </a:pPr>
-            <a:r>
-              <a:rPr lang="en-US" sz="1600" b="1" dirty="0">
-                <a:solidFill>
-                  <a:srgbClr val="08A6A6"/>
-                </a:solidFill>
-                <a:latin typeface="IBM Plex Sans" pitchFamily="34" charset="0"/>
-                <a:ea typeface="IBM Plex Sans" pitchFamily="34" charset="-122"/>
-                <a:cs typeface="IBM Plex Sans" pitchFamily="34" charset="-120"/>
-              </a:rPr>
-              <a:t>Keys, not passwords</a:t>
+              <a:t>Predict on paper first, then look down and test it.</a:t>
             </a:r>
             <a:endParaRPr lang="en-US" sz="1600" dirty="0"/>
-          </a:p>
-        </p:txBody>
-      </p:sp>
-      <p:sp>
-        <p:nvSpPr>
-          <p:cNvPr id="12" name="Text 10"/>
-          <p:cNvSpPr txBox="1"/>
-          <p:nvPr/>
-        </p:nvSpPr>
-        <p:spPr>
-          <a:xfrm>
-            <a:off x="6537960" y="2395728"/>
-            <a:ext cx="4754880" cy="1005840"/>
-          </a:xfrm>
-          <a:prstGeom prst="rect">
-            <a:avLst/>
-          </a:prstGeom>
-          <a:noFill/>
-          <a:ln/>
-        </p:spPr>
-        <p:txBody>
-          <a:bodyPr wrap="square" lIns="0" tIns="0" rIns="0" bIns="0" rtlCol="0" anchor="t"/>
-          <a:lstStyle/>
-          <a:p>
-            <a:pPr indent="0" marL="0">
-              <a:lnSpc>
-                <a:spcPct val="120000"/>
-              </a:lnSpc>
-              <a:buNone/>
-            </a:pPr>
-            <a:r>
-              <a:rPr lang="en-US" sz="1300" dirty="0">
-                <a:solidFill>
-                  <a:srgbClr val="667085"/>
-                </a:solidFill>
-                <a:latin typeface="IBM Plex Sans" pitchFamily="34" charset="0"/>
-                <a:ea typeface="IBM Plex Sans" pitchFamily="34" charset="-122"/>
-                <a:cs typeface="IBM Plex Sans" pitchFamily="34" charset="-120"/>
-              </a:rPr>
-              <a:t>An encryption key is far longer than a password. A 256-bit key has more combinations than there are atoms in the observable universe.</a:t>
-            </a:r>
-            <a:endParaRPr lang="en-US" sz="1300" dirty="0"/>
-          </a:p>
-        </p:txBody>
-      </p:sp>
-      <p:sp>
-        <p:nvSpPr>
-          <p:cNvPr id="13" name="Shape 11"/>
-          <p:cNvSpPr/>
-          <p:nvPr/>
-        </p:nvSpPr>
-        <p:spPr>
-          <a:xfrm>
-            <a:off x="502920" y="3794760"/>
-            <a:ext cx="5394960" cy="1737360"/>
-          </a:xfrm>
-          <a:prstGeom prst="roundRect">
-            <a:avLst>
-              <a:gd name="adj" fmla="val 6316"/>
-            </a:avLst>
-          </a:prstGeom>
-          <a:solidFill>
-            <a:srgbClr val="FFFFFF"/>
-          </a:solidFill>
-          <a:ln w="15875">
-            <a:solidFill>
-              <a:srgbClr val="2D63FF"/>
-            </a:solidFill>
-            <a:prstDash val="solid"/>
-          </a:ln>
-        </p:spPr>
-      </p:sp>
-      <p:sp>
-        <p:nvSpPr>
-          <p:cNvPr id="14" name="Text 12"/>
-          <p:cNvSpPr txBox="1"/>
-          <p:nvPr/>
-        </p:nvSpPr>
-        <p:spPr>
-          <a:xfrm>
-            <a:off x="822960" y="3977640"/>
-            <a:ext cx="4754880" cy="365760"/>
-          </a:xfrm>
-          <a:prstGeom prst="rect">
-            <a:avLst/>
-          </a:prstGeom>
-          <a:noFill/>
-          <a:ln/>
-        </p:spPr>
-        <p:txBody>
-          <a:bodyPr wrap="square" lIns="0" tIns="0" rIns="0" bIns="0" rtlCol="0" anchor="ctr"/>
-          <a:lstStyle/>
-          <a:p>
-            <a:pPr indent="0" marL="0">
-              <a:buNone/>
-            </a:pPr>
-            <a:r>
-              <a:rPr lang="en-US" sz="1600" b="1" dirty="0">
-                <a:solidFill>
-                  <a:srgbClr val="2D63FF"/>
-                </a:solidFill>
-                <a:latin typeface="IBM Plex Sans" pitchFamily="34" charset="0"/>
-                <a:ea typeface="IBM Plex Sans" pitchFamily="34" charset="-122"/>
-                <a:cs typeface="IBM Plex Sans" pitchFamily="34" charset="-120"/>
-              </a:rPr>
-              <a:t>Why disks fragment</a:t>
-            </a:r>
-            <a:endParaRPr lang="en-US" sz="1600" dirty="0"/>
-          </a:p>
-        </p:txBody>
-      </p:sp>
-      <p:sp>
-        <p:nvSpPr>
-          <p:cNvPr id="15" name="Text 13"/>
-          <p:cNvSpPr txBox="1"/>
-          <p:nvPr/>
-        </p:nvSpPr>
-        <p:spPr>
-          <a:xfrm>
-            <a:off x="822960" y="4361688"/>
-            <a:ext cx="4754880" cy="1005840"/>
-          </a:xfrm>
-          <a:prstGeom prst="rect">
-            <a:avLst/>
-          </a:prstGeom>
-          <a:noFill/>
-          <a:ln/>
-        </p:spPr>
-        <p:txBody>
-          <a:bodyPr wrap="square" lIns="0" tIns="0" rIns="0" bIns="0" rtlCol="0" anchor="t"/>
-          <a:lstStyle/>
-          <a:p>
-            <a:pPr indent="0" marL="0">
-              <a:lnSpc>
-                <a:spcPct val="120000"/>
-              </a:lnSpc>
-              <a:buNone/>
-            </a:pPr>
-            <a:r>
-              <a:rPr lang="en-US" sz="1300" dirty="0">
-                <a:solidFill>
-                  <a:srgbClr val="667085"/>
-                </a:solidFill>
-                <a:latin typeface="IBM Plex Sans" pitchFamily="34" charset="0"/>
-                <a:ea typeface="IBM Plex Sans" pitchFamily="34" charset="-122"/>
-                <a:cs typeface="IBM Plex Sans" pitchFamily="34" charset="-120"/>
-              </a:rPr>
-              <a:t>When a file grows and the space after it is taken, the extra has to go elsewhere. Do that for years and files end up in dozens of pieces.</a:t>
-            </a:r>
-            <a:endParaRPr lang="en-US" sz="1300" dirty="0"/>
-          </a:p>
-        </p:txBody>
-      </p:sp>
-      <p:sp>
-        <p:nvSpPr>
-          <p:cNvPr id="16" name="Shape 14"/>
-          <p:cNvSpPr/>
-          <p:nvPr/>
-        </p:nvSpPr>
-        <p:spPr>
-          <a:xfrm>
-            <a:off x="6217920" y="3794760"/>
-            <a:ext cx="5394960" cy="1737360"/>
-          </a:xfrm>
-          <a:prstGeom prst="roundRect">
-            <a:avLst>
-              <a:gd name="adj" fmla="val 6316"/>
-            </a:avLst>
-          </a:prstGeom>
-          <a:solidFill>
-            <a:srgbClr val="FFFFFF"/>
-          </a:solidFill>
-          <a:ln w="15875">
-            <a:solidFill>
-              <a:srgbClr val="08A6A6"/>
-            </a:solidFill>
-            <a:prstDash val="solid"/>
-          </a:ln>
-        </p:spPr>
-      </p:sp>
-      <p:sp>
-        <p:nvSpPr>
-          <p:cNvPr id="17" name="Text 15"/>
-          <p:cNvSpPr txBox="1"/>
-          <p:nvPr/>
-        </p:nvSpPr>
-        <p:spPr>
-          <a:xfrm>
-            <a:off x="6537960" y="3977640"/>
-            <a:ext cx="4754880" cy="365760"/>
-          </a:xfrm>
-          <a:prstGeom prst="rect">
-            <a:avLst/>
-          </a:prstGeom>
-          <a:noFill/>
-          <a:ln/>
-        </p:spPr>
-        <p:txBody>
-          <a:bodyPr wrap="square" lIns="0" tIns="0" rIns="0" bIns="0" rtlCol="0" anchor="ctr"/>
-          <a:lstStyle/>
-          <a:p>
-            <a:pPr indent="0" marL="0">
-              <a:buNone/>
-            </a:pPr>
-            <a:r>
-              <a:rPr lang="en-US" sz="1600" b="1" dirty="0">
-                <a:solidFill>
-                  <a:srgbClr val="08A6A6"/>
-                </a:solidFill>
-                <a:latin typeface="IBM Plex Sans" pitchFamily="34" charset="0"/>
-                <a:ea typeface="IBM Plex Sans" pitchFamily="34" charset="-122"/>
-                <a:cs typeface="IBM Plex Sans" pitchFamily="34" charset="-120"/>
-              </a:rPr>
-              <a:t>Zip is everywhere</a:t>
-            </a:r>
-            <a:endParaRPr lang="en-US" sz="1600" dirty="0"/>
-          </a:p>
-        </p:txBody>
-      </p:sp>
-      <p:sp>
-        <p:nvSpPr>
-          <p:cNvPr id="18" name="Text 16"/>
-          <p:cNvSpPr txBox="1"/>
-          <p:nvPr/>
-        </p:nvSpPr>
-        <p:spPr>
-          <a:xfrm>
-            <a:off x="6537960" y="4361688"/>
-            <a:ext cx="4754880" cy="1005840"/>
-          </a:xfrm>
-          <a:prstGeom prst="rect">
-            <a:avLst/>
-          </a:prstGeom>
-          <a:noFill/>
-          <a:ln/>
-        </p:spPr>
-        <p:txBody>
-          <a:bodyPr wrap="square" lIns="0" tIns="0" rIns="0" bIns="0" rtlCol="0" anchor="t"/>
-          <a:lstStyle/>
-          <a:p>
-            <a:pPr indent="0" marL="0">
-              <a:lnSpc>
-                <a:spcPct val="120000"/>
-              </a:lnSpc>
-              <a:buNone/>
-            </a:pPr>
-            <a:r>
-              <a:rPr lang="en-US" sz="1300" dirty="0">
-                <a:solidFill>
-                  <a:srgbClr val="667085"/>
-                </a:solidFill>
-                <a:latin typeface="IBM Plex Sans" pitchFamily="34" charset="0"/>
-                <a:ea typeface="IBM Plex Sans" pitchFamily="34" charset="-122"/>
-                <a:cs typeface="IBM Plex Sans" pitchFamily="34" charset="-120"/>
-              </a:rPr>
-              <a:t>A .docx file is really a zip archive: rename one to .zip and open it to find the document's parts inside.</a:t>
-            </a:r>
-            <a:endParaRPr lang="en-US" sz="1300" dirty="0"/>
           </a:p>
         </p:txBody>
       </p:sp>
@@ -3928,7 +4175,7 @@
                 <a:ea typeface="IBM Plex Sans" pitchFamily="34" charset="-122"/>
                 <a:cs typeface="IBM Plex Sans" pitchFamily="34" charset="-120"/>
               </a:rPr>
-              <a:t>Exam practice</a:t>
+              <a:t>Worth knowing</a:t>
             </a:r>
             <a:endParaRPr lang="en-US" sz="3200" dirty="0"/>
           </a:p>
@@ -3967,7 +4214,7 @@
                 <a:ea typeface="IBM Plex Sans" pitchFamily="34" charset="-122"/>
                 <a:cs typeface="IBM Plex Sans" pitchFamily="34" charset="-120"/>
               </a:rPr>
-              <a:t>Devices away. Answer from memory on the worksheet.</a:t>
+              <a:t>The information markers dotted around the room</a:t>
             </a:r>
             <a:endParaRPr lang="en-US" sz="1500" dirty="0"/>
           </a:p>
@@ -3982,11 +4229,11 @@
         <p:spPr>
           <a:xfrm>
             <a:off x="502920" y="1828800"/>
-            <a:ext cx="11155680" cy="1097280"/>
+            <a:ext cx="5394960" cy="1737360"/>
           </a:xfrm>
           <a:prstGeom prst="roundRect">
             <a:avLst>
-              <a:gd name="adj" fmla="val 10000"/>
+              <a:gd name="adj" fmla="val 6316"/>
             </a:avLst>
           </a:prstGeom>
           <a:solidFill>
@@ -3994,7 +4241,7 @@
           </a:solidFill>
           <a:ln w="15875">
             <a:solidFill>
-              <a:srgbClr val="D9DEE7"/>
+              <a:srgbClr val="2D63FF"/>
             </a:solidFill>
             <a:prstDash val="solid"/>
           </a:ln>
@@ -4008,8 +4255,8 @@
         </p:nvSpPr>
         <p:spPr>
           <a:xfrm>
-            <a:off x="914400" y="1938528"/>
-            <a:ext cx="9418320" cy="877824"/>
+            <a:off x="822960" y="2011680"/>
+            <a:ext cx="4754880" cy="365760"/>
           </a:xfrm>
           <a:prstGeom prst="rect">
             <a:avLst/>
@@ -4022,101 +4269,79 @@
           <a:lstStyle/>
           <a:p>
             <a:pPr indent="0" marL="0">
-              <a:lnSpc>
-                <a:spcPct val="118000"/>
-              </a:lnSpc>
-              <a:buNone/>
-            </a:pPr>
-            <a:r>
-              <a:rPr lang="en-US" sz="1700" dirty="0">
-                <a:solidFill>
-                  <a:srgbClr val="101828"/>
+              <a:buNone/>
+            </a:pPr>
+            <a:r>
+              <a:rPr lang="en-US" sz="1600" b="1" dirty="0">
+                <a:solidFill>
+                  <a:srgbClr val="2D63FF"/>
                 </a:solidFill>
                 <a:latin typeface="IBM Plex Sans" pitchFamily="34" charset="0"/>
                 <a:ea typeface="IBM Plex Sans" pitchFamily="34" charset="-122"/>
                 <a:cs typeface="IBM Plex Sans" pitchFamily="34" charset="-120"/>
               </a:rPr>
-              <a:t>State what is meant by utility software, and give two examples.</a:t>
-            </a:r>
-            <a:endParaRPr lang="en-US" sz="1700" dirty="0"/>
-          </a:p>
-        </p:txBody>
-      </p:sp>
-      <p:sp>
-        <p:nvSpPr>
-          <p:cNvPr id="9" name="Shape 7"/>
+              <a:t>Utilities used to be separate</a:t>
+            </a:r>
+            <a:endParaRPr lang="en-US" sz="1600" dirty="0"/>
+          </a:p>
+        </p:txBody>
+      </p:sp>
+      <p:sp>
+        <p:nvSpPr>
+          <p:cNvPr id="9" name="Text 7"/>
+          <p:cNvSpPr txBox="1"/>
+          <p:nvPr/>
+        </p:nvSpPr>
+        <p:spPr>
+          <a:xfrm>
+            <a:off x="822960" y="2395728"/>
+            <a:ext cx="4754880" cy="1005840"/>
+          </a:xfrm>
+          <a:prstGeom prst="rect">
+            <a:avLst/>
+          </a:prstGeom>
+          <a:noFill/>
+          <a:ln/>
+        </p:spPr>
+        <p:txBody>
+          <a:bodyPr wrap="square" lIns="0" tIns="0" rIns="0" bIns="0" rtlCol="0" anchor="t"/>
+          <a:lstStyle/>
+          <a:p>
+            <a:pPr indent="0" marL="0">
+              <a:lnSpc>
+                <a:spcPct val="120000"/>
+              </a:lnSpc>
+              <a:buNone/>
+            </a:pPr>
+            <a:r>
+              <a:rPr lang="en-US" sz="1300" dirty="0">
+                <a:solidFill>
+                  <a:srgbClr val="667085"/>
+                </a:solidFill>
+                <a:latin typeface="IBM Plex Sans" pitchFamily="34" charset="0"/>
+                <a:ea typeface="IBM Plex Sans" pitchFamily="34" charset="-122"/>
+                <a:cs typeface="IBM Plex Sans" pitchFamily="34" charset="-120"/>
+              </a:rPr>
+              <a:t>Defragmenters, backup tools and antivirus were once programs you bought. Most are now built into the operating system.</a:t>
+            </a:r>
+            <a:endParaRPr lang="en-US" sz="1300" dirty="0"/>
+          </a:p>
+        </p:txBody>
+      </p:sp>
+      <p:sp>
+        <p:nvSpPr>
+          <p:cNvPr id="10" name="Shape 8"/>
           <p:cNvSpPr/>
           <p:nvPr/>
         </p:nvSpPr>
         <p:spPr>
           <a:xfrm>
-            <a:off x="10515600" y="2130552"/>
-            <a:ext cx="868680" cy="493776"/>
+            <a:off x="6217920" y="1828800"/>
+            <a:ext cx="5394960" cy="1737360"/>
           </a:xfrm>
           <a:prstGeom prst="roundRect">
             <a:avLst>
-              <a:gd name="adj" fmla="val 18519"/>
-            </a:avLst>
-          </a:prstGeom>
-          <a:solidFill>
-            <a:srgbClr val="EEF2FB"/>
-          </a:solidFill>
-          <a:ln/>
-        </p:spPr>
-      </p:sp>
-      <p:sp>
-        <p:nvSpPr>
-          <p:cNvPr id="10" name="Text 8"/>
-          <p:cNvSpPr txBox="1"/>
-          <p:nvPr/>
-        </p:nvSpPr>
-        <p:spPr>
-          <a:xfrm>
-            <a:off x="10515600" y="2130552"/>
-            <a:ext cx="868680" cy="493776"/>
-          </a:xfrm>
-          <a:prstGeom prst="rect">
-            <a:avLst/>
-          </a:prstGeom>
-          <a:noFill/>
-          <a:ln/>
-        </p:spPr>
-        <p:txBody>
-          <a:bodyPr wrap="square" lIns="0" tIns="0" rIns="0" bIns="0" rtlCol="0" anchor="ctr"/>
-          <a:lstStyle/>
-          <a:p>
-            <a:pPr algn="ctr" indent="0" marL="0">
-              <a:buNone/>
-            </a:pPr>
-            <a:r>
-              <a:rPr lang="en-US" sz="1500" b="1" dirty="0">
-                <a:solidFill>
-                  <a:srgbClr val="2D63FF"/>
-                </a:solidFill>
-                <a:latin typeface="IBM Plex Mono" pitchFamily="34" charset="0"/>
-                <a:ea typeface="IBM Plex Mono" pitchFamily="34" charset="-122"/>
-                <a:cs typeface="IBM Plex Mono" pitchFamily="34" charset="-120"/>
-              </a:rPr>
-              <a:t>[3]</a:t>
-            </a:r>
-            <a:endParaRPr lang="en-US" sz="1500" dirty="0"/>
-          </a:p>
-        </p:txBody>
-      </p:sp>
-      <p:sp>
-        <p:nvSpPr>
-          <p:cNvPr id="11" name="Shape 9"/>
-          <p:cNvSpPr/>
-          <p:nvPr/>
-        </p:nvSpPr>
-        <p:spPr>
-          <a:xfrm>
-            <a:off x="502920" y="3127248"/>
-            <a:ext cx="11155680" cy="1097280"/>
-          </a:xfrm>
-          <a:prstGeom prst="roundRect">
-            <a:avLst>
-              <a:gd name="adj" fmla="val 10000"/>
+              <a:gd name="adj" fmla="val 6316"/>
             </a:avLst>
           </a:prstGeom>
           <a:solidFill>
@@ -4124,7 +4349,7 @@
           </a:solidFill>
           <a:ln w="15875">
             <a:solidFill>
-              <a:srgbClr val="D9DEE7"/>
+              <a:srgbClr val="08A6A6"/>
             </a:solidFill>
             <a:prstDash val="solid"/>
           </a:ln>
@@ -4132,14 +4357,14 @@
       </p:sp>
       <p:sp>
         <p:nvSpPr>
-          <p:cNvPr id="12" name="Text 10"/>
-          <p:cNvSpPr txBox="1"/>
-          <p:nvPr/>
-        </p:nvSpPr>
-        <p:spPr>
-          <a:xfrm>
-            <a:off x="914400" y="3236976"/>
-            <a:ext cx="9418320" cy="877824"/>
+          <p:cNvPr id="11" name="Text 9"/>
+          <p:cNvSpPr txBox="1"/>
+          <p:nvPr/>
+        </p:nvSpPr>
+        <p:spPr>
+          <a:xfrm>
+            <a:off x="6537960" y="2011680"/>
+            <a:ext cx="4754880" cy="365760"/>
           </a:xfrm>
           <a:prstGeom prst="rect">
             <a:avLst/>
@@ -4152,23 +4377,62 @@
           <a:lstStyle/>
           <a:p>
             <a:pPr indent="0" marL="0">
-              <a:lnSpc>
-                <a:spcPct val="118000"/>
-              </a:lnSpc>
-              <a:buNone/>
-            </a:pPr>
-            <a:r>
-              <a:rPr lang="en-US" sz="1700" dirty="0">
-                <a:solidFill>
-                  <a:srgbClr val="101828"/>
+              <a:buNone/>
+            </a:pPr>
+            <a:r>
+              <a:rPr lang="en-US" sz="1600" b="1" dirty="0">
+                <a:solidFill>
+                  <a:srgbClr val="08A6A6"/>
                 </a:solidFill>
                 <a:latin typeface="IBM Plex Sans" pitchFamily="34" charset="0"/>
                 <a:ea typeface="IBM Plex Sans" pitchFamily="34" charset="-122"/>
                 <a:cs typeface="IBM Plex Sans" pitchFamily="34" charset="-120"/>
               </a:rPr>
-              <a:t>Describe how a defragmentation utility improves the performance of a hard disk drive.</a:t>
-            </a:r>
-            <a:endParaRPr lang="en-US" sz="1700" dirty="0"/>
+              <a:t>Keys, not passwords</a:t>
+            </a:r>
+            <a:endParaRPr lang="en-US" sz="1600" dirty="0"/>
+          </a:p>
+        </p:txBody>
+      </p:sp>
+      <p:sp>
+        <p:nvSpPr>
+          <p:cNvPr id="12" name="Text 10"/>
+          <p:cNvSpPr txBox="1"/>
+          <p:nvPr/>
+        </p:nvSpPr>
+        <p:spPr>
+          <a:xfrm>
+            <a:off x="6537960" y="2395728"/>
+            <a:ext cx="4754880" cy="1005840"/>
+          </a:xfrm>
+          <a:prstGeom prst="rect">
+            <a:avLst/>
+          </a:prstGeom>
+          <a:noFill/>
+          <a:ln/>
+        </p:spPr>
+        <p:txBody>
+          <a:bodyPr wrap="square" lIns="0" tIns="0" rIns="0" bIns="0" rtlCol="0" anchor="t"/>
+          <a:lstStyle/>
+          <a:p>
+            <a:pPr indent="0" marL="0">
+              <a:lnSpc>
+                <a:spcPct val="120000"/>
+              </a:lnSpc>
+              <a:buNone/>
+            </a:pPr>
+            <a:r>
+              <a:rPr lang="en-US" sz="1300" dirty="0">
+                <a:solidFill>
+                  <a:srgbClr val="667085"/>
+                </a:solidFill>
+                <a:latin typeface="IBM Plex Sans" pitchFamily="34" charset="0"/>
+                <a:ea typeface="IBM Plex Sans" pitchFamily="34" charset="-122"/>
+                <a:cs typeface="IBM Plex Sans" pitchFamily="34" charset="-120"/>
+              </a:rPr>
+              <a:t>An encryption key is far longer than a password. A 256-bit key has more combinations than there are atoms in the observable universe.</a:t>
+            </a:r>
+            <a:endParaRPr lang="en-US" sz="1300" dirty="0"/>
           </a:p>
         </p:txBody>
       </p:sp>
@@ -4180,73 +4444,12 @@
         </p:nvSpPr>
         <p:spPr>
           <a:xfrm>
-            <a:off x="10515600" y="3429000"/>
-            <a:ext cx="868680" cy="493776"/>
+            <a:off x="502920" y="3794760"/>
+            <a:ext cx="5394960" cy="1737360"/>
           </a:xfrm>
           <a:prstGeom prst="roundRect">
             <a:avLst>
-              <a:gd name="adj" fmla="val 18519"/>
-            </a:avLst>
-          </a:prstGeom>
-          <a:solidFill>
-            <a:srgbClr val="EEF2FB"/>
-          </a:solidFill>
-          <a:ln/>
-        </p:spPr>
-      </p:sp>
-      <p:sp>
-        <p:nvSpPr>
-          <p:cNvPr id="14" name="Text 12"/>
-          <p:cNvSpPr txBox="1"/>
-          <p:nvPr/>
-        </p:nvSpPr>
-        <p:spPr>
-          <a:xfrm>
-            <a:off x="10515600" y="3429000"/>
-            <a:ext cx="868680" cy="493776"/>
-          </a:xfrm>
-          <a:prstGeom prst="rect">
-            <a:avLst/>
-          </a:prstGeom>
-          <a:noFill/>
-          <a:ln/>
-        </p:spPr>
-        <p:txBody>
-          <a:bodyPr wrap="square" lIns="0" tIns="0" rIns="0" bIns="0" rtlCol="0" anchor="ctr"/>
-          <a:lstStyle/>
-          <a:p>
-            <a:pPr algn="ctr" indent="0" marL="0">
-              <a:buNone/>
-            </a:pPr>
-            <a:r>
-              <a:rPr lang="en-US" sz="1500" b="1" dirty="0">
-                <a:solidFill>
-                  <a:srgbClr val="2D63FF"/>
-                </a:solidFill>
-                <a:latin typeface="IBM Plex Mono" pitchFamily="34" charset="0"/>
-                <a:ea typeface="IBM Plex Mono" pitchFamily="34" charset="-122"/>
-                <a:cs typeface="IBM Plex Mono" pitchFamily="34" charset="-120"/>
-              </a:rPr>
-              <a:t>[4]</a:t>
-            </a:r>
-            <a:endParaRPr lang="en-US" sz="1500" dirty="0"/>
-          </a:p>
-        </p:txBody>
-      </p:sp>
-      <p:sp>
-        <p:nvSpPr>
-          <p:cNvPr id="15" name="Shape 13"/>
-          <p:cNvSpPr/>
-          <p:nvPr/>
-        </p:nvSpPr>
-        <p:spPr>
-          <a:xfrm>
-            <a:off x="502920" y="4425696"/>
-            <a:ext cx="11155680" cy="1097280"/>
-          </a:xfrm>
-          <a:prstGeom prst="roundRect">
-            <a:avLst>
-              <a:gd name="adj" fmla="val 10000"/>
+              <a:gd name="adj" fmla="val 6316"/>
             </a:avLst>
           </a:prstGeom>
           <a:solidFill>
@@ -4254,7 +4457,7 @@
           </a:solidFill>
           <a:ln w="15875">
             <a:solidFill>
-              <a:srgbClr val="D9DEE7"/>
+              <a:srgbClr val="2D63FF"/>
             </a:solidFill>
             <a:prstDash val="solid"/>
           </a:ln>
@@ -4262,14 +4465,14 @@
       </p:sp>
       <p:sp>
         <p:nvSpPr>
-          <p:cNvPr id="16" name="Text 14"/>
-          <p:cNvSpPr txBox="1"/>
-          <p:nvPr/>
-        </p:nvSpPr>
-        <p:spPr>
-          <a:xfrm>
-            <a:off x="914400" y="4535424"/>
-            <a:ext cx="9418320" cy="877824"/>
+          <p:cNvPr id="14" name="Text 12"/>
+          <p:cNvSpPr txBox="1"/>
+          <p:nvPr/>
+        </p:nvSpPr>
+        <p:spPr>
+          <a:xfrm>
+            <a:off x="822960" y="3977640"/>
+            <a:ext cx="4754880" cy="365760"/>
           </a:xfrm>
           <a:prstGeom prst="rect">
             <a:avLst/>
@@ -4282,47 +4485,130 @@
           <a:lstStyle/>
           <a:p>
             <a:pPr indent="0" marL="0">
-              <a:lnSpc>
-                <a:spcPct val="118000"/>
-              </a:lnSpc>
-              <a:buNone/>
-            </a:pPr>
-            <a:r>
-              <a:rPr lang="en-US" sz="1700" dirty="0">
-                <a:solidFill>
-                  <a:srgbClr val="101828"/>
+              <a:buNone/>
+            </a:pPr>
+            <a:r>
+              <a:rPr lang="en-US" sz="1600" b="1" dirty="0">
+                <a:solidFill>
+                  <a:srgbClr val="2D63FF"/>
                 </a:solidFill>
                 <a:latin typeface="IBM Plex Sans" pitchFamily="34" charset="0"/>
                 <a:ea typeface="IBM Plex Sans" pitchFamily="34" charset="-122"/>
                 <a:cs typeface="IBM Plex Sans" pitchFamily="34" charset="-120"/>
               </a:rPr>
-              <a:t>A company gives every employee a laptop that leaves the building. Recommend two utilities and justify each choice.</a:t>
-            </a:r>
-            <a:endParaRPr lang="en-US" sz="1700" dirty="0"/>
-          </a:p>
-        </p:txBody>
-      </p:sp>
-      <p:sp>
-        <p:nvSpPr>
-          <p:cNvPr id="17" name="Shape 15"/>
+              <a:t>Why disks fragment</a:t>
+            </a:r>
+            <a:endParaRPr lang="en-US" sz="1600" dirty="0"/>
+          </a:p>
+        </p:txBody>
+      </p:sp>
+      <p:sp>
+        <p:nvSpPr>
+          <p:cNvPr id="15" name="Text 13"/>
+          <p:cNvSpPr txBox="1"/>
+          <p:nvPr/>
+        </p:nvSpPr>
+        <p:spPr>
+          <a:xfrm>
+            <a:off x="822960" y="4361688"/>
+            <a:ext cx="4754880" cy="1005840"/>
+          </a:xfrm>
+          <a:prstGeom prst="rect">
+            <a:avLst/>
+          </a:prstGeom>
+          <a:noFill/>
+          <a:ln/>
+        </p:spPr>
+        <p:txBody>
+          <a:bodyPr wrap="square" lIns="0" tIns="0" rIns="0" bIns="0" rtlCol="0" anchor="t"/>
+          <a:lstStyle/>
+          <a:p>
+            <a:pPr indent="0" marL="0">
+              <a:lnSpc>
+                <a:spcPct val="120000"/>
+              </a:lnSpc>
+              <a:buNone/>
+            </a:pPr>
+            <a:r>
+              <a:rPr lang="en-US" sz="1300" dirty="0">
+                <a:solidFill>
+                  <a:srgbClr val="667085"/>
+                </a:solidFill>
+                <a:latin typeface="IBM Plex Sans" pitchFamily="34" charset="0"/>
+                <a:ea typeface="IBM Plex Sans" pitchFamily="34" charset="-122"/>
+                <a:cs typeface="IBM Plex Sans" pitchFamily="34" charset="-120"/>
+              </a:rPr>
+              <a:t>When a file grows and the space after it is taken, the extra has to go elsewhere. Do that for years and files end up in dozens of pieces.</a:t>
+            </a:r>
+            <a:endParaRPr lang="en-US" sz="1300" dirty="0"/>
+          </a:p>
+        </p:txBody>
+      </p:sp>
+      <p:sp>
+        <p:nvSpPr>
+          <p:cNvPr id="16" name="Shape 14"/>
           <p:cNvSpPr/>
           <p:nvPr/>
         </p:nvSpPr>
         <p:spPr>
           <a:xfrm>
-            <a:off x="10515600" y="4727448"/>
-            <a:ext cx="868680" cy="493776"/>
+            <a:off x="6217920" y="3794760"/>
+            <a:ext cx="5394960" cy="1737360"/>
           </a:xfrm>
           <a:prstGeom prst="roundRect">
             <a:avLst>
-              <a:gd name="adj" fmla="val 18519"/>
+              <a:gd name="adj" fmla="val 6316"/>
             </a:avLst>
           </a:prstGeom>
           <a:solidFill>
-            <a:srgbClr val="EEF2FB"/>
+            <a:srgbClr val="FFFFFF"/>
           </a:solidFill>
-          <a:ln/>
-        </p:spPr>
+          <a:ln w="15875">
+            <a:solidFill>
+              <a:srgbClr val="08A6A6"/>
+            </a:solidFill>
+            <a:prstDash val="solid"/>
+          </a:ln>
+        </p:spPr>
+      </p:sp>
+      <p:sp>
+        <p:nvSpPr>
+          <p:cNvPr id="17" name="Text 15"/>
+          <p:cNvSpPr txBox="1"/>
+          <p:nvPr/>
+        </p:nvSpPr>
+        <p:spPr>
+          <a:xfrm>
+            <a:off x="6537960" y="3977640"/>
+            <a:ext cx="4754880" cy="365760"/>
+          </a:xfrm>
+          <a:prstGeom prst="rect">
+            <a:avLst/>
+          </a:prstGeom>
+          <a:noFill/>
+          <a:ln/>
+        </p:spPr>
+        <p:txBody>
+          <a:bodyPr wrap="square" lIns="0" tIns="0" rIns="0" bIns="0" rtlCol="0" anchor="ctr"/>
+          <a:lstStyle/>
+          <a:p>
+            <a:pPr indent="0" marL="0">
+              <a:buNone/>
+            </a:pPr>
+            <a:r>
+              <a:rPr lang="en-US" sz="1600" b="1" dirty="0">
+                <a:solidFill>
+                  <a:srgbClr val="08A6A6"/>
+                </a:solidFill>
+                <a:latin typeface="IBM Plex Sans" pitchFamily="34" charset="0"/>
+                <a:ea typeface="IBM Plex Sans" pitchFamily="34" charset="-122"/>
+                <a:cs typeface="IBM Plex Sans" pitchFamily="34" charset="-120"/>
+              </a:rPr>
+              <a:t>Zip is everywhere</a:t>
+            </a:r>
+            <a:endParaRPr lang="en-US" sz="1600" dirty="0"/>
+          </a:p>
+        </p:txBody>
       </p:sp>
       <p:sp>
         <p:nvSpPr>
@@ -4332,34 +4618,37 @@
         </p:nvSpPr>
         <p:spPr>
           <a:xfrm>
-            <a:off x="10515600" y="4727448"/>
-            <a:ext cx="868680" cy="493776"/>
-          </a:xfrm>
-          <a:prstGeom prst="rect">
-            <a:avLst/>
-          </a:prstGeom>
-          <a:noFill/>
-          <a:ln/>
-        </p:spPr>
-        <p:txBody>
-          <a:bodyPr wrap="square" lIns="0" tIns="0" rIns="0" bIns="0" rtlCol="0" anchor="ctr"/>
-          <a:lstStyle/>
-          <a:p>
-            <a:pPr algn="ctr" indent="0" marL="0">
-              <a:buNone/>
-            </a:pPr>
-            <a:r>
-              <a:rPr lang="en-US" sz="1500" b="1" dirty="0">
-                <a:solidFill>
-                  <a:srgbClr val="2D63FF"/>
-                </a:solidFill>
-                <a:latin typeface="IBM Plex Mono" pitchFamily="34" charset="0"/>
-                <a:ea typeface="IBM Plex Mono" pitchFamily="34" charset="-122"/>
-                <a:cs typeface="IBM Plex Mono" pitchFamily="34" charset="-120"/>
-              </a:rPr>
-              <a:t>[6]</a:t>
-            </a:r>
-            <a:endParaRPr lang="en-US" sz="1500" dirty="0"/>
+            <a:off x="6537960" y="4361688"/>
+            <a:ext cx="4754880" cy="1005840"/>
+          </a:xfrm>
+          <a:prstGeom prst="rect">
+            <a:avLst/>
+          </a:prstGeom>
+          <a:noFill/>
+          <a:ln/>
+        </p:spPr>
+        <p:txBody>
+          <a:bodyPr wrap="square" lIns="0" tIns="0" rIns="0" bIns="0" rtlCol="0" anchor="t"/>
+          <a:lstStyle/>
+          <a:p>
+            <a:pPr indent="0" marL="0">
+              <a:lnSpc>
+                <a:spcPct val="120000"/>
+              </a:lnSpc>
+              <a:buNone/>
+            </a:pPr>
+            <a:r>
+              <a:rPr lang="en-US" sz="1300" dirty="0">
+                <a:solidFill>
+                  <a:srgbClr val="667085"/>
+                </a:solidFill>
+                <a:latin typeface="IBM Plex Sans" pitchFamily="34" charset="0"/>
+                <a:ea typeface="IBM Plex Sans" pitchFamily="34" charset="-122"/>
+                <a:cs typeface="IBM Plex Sans" pitchFamily="34" charset="-120"/>
+              </a:rPr>
+              <a:t>A .docx file is really a zip archive: rename one to .zip and open it to find the document's parts inside.</a:t>
+            </a:r>
+            <a:endParaRPr lang="en-US" sz="1300" dirty="0"/>
           </a:p>
         </p:txBody>
       </p:sp>
@@ -4374,6 +4663,604 @@
 <file path=ppt/slides/slide14.xml><?xml version="1.0" encoding="utf-8"?>
 <p:sld xmlns:a="http://schemas.openxmlformats.org/drawingml/2006/main" xmlns:r="http://schemas.openxmlformats.org/officeDocument/2006/relationships" xmlns:p="http://schemas.openxmlformats.org/presentationml/2006/main">
   <p:cSld name="Slide 14">
+    <p:bg>
+      <p:bgPr>
+        <a:solidFill>
+          <a:srgbClr val="F7F7F4"/>
+        </a:solidFill>
+      </p:bgPr>
+    </p:bg>
+    <p:spTree>
+      <p:nvGrpSpPr>
+        <p:cNvPr id="1" name=""/>
+        <p:cNvGrpSpPr/>
+        <p:nvPr/>
+      </p:nvGrpSpPr>
+      <p:grpSpPr>
+        <a:xfrm>
+          <a:off x="0" y="0"/>
+          <a:ext cx="0" cy="0"/>
+          <a:chOff x="0" y="0"/>
+          <a:chExt cx="0" cy="0"/>
+        </a:xfrm>
+      </p:grpSpPr>
+      <p:sp>
+        <p:nvSpPr>
+          <p:cNvPr id="2" name="Shape 0"/>
+          <p:cNvSpPr/>
+          <p:nvPr/>
+        </p:nvSpPr>
+        <p:spPr>
+          <a:xfrm>
+            <a:off x="0" y="0"/>
+            <a:ext cx="12188952" cy="82296"/>
+          </a:xfrm>
+          <a:prstGeom prst="rect">
+            <a:avLst/>
+          </a:prstGeom>
+          <a:solidFill>
+            <a:srgbClr val="2D63FF"/>
+          </a:solidFill>
+          <a:ln/>
+        </p:spPr>
+      </p:sp>
+      <p:sp>
+        <p:nvSpPr>
+          <p:cNvPr id="3" name="Text 1"/>
+          <p:cNvSpPr txBox="1"/>
+          <p:nvPr/>
+        </p:nvSpPr>
+        <p:spPr>
+          <a:xfrm>
+            <a:off x="502920" y="6236208"/>
+            <a:ext cx="7772400" cy="365760"/>
+          </a:xfrm>
+          <a:prstGeom prst="rect">
+            <a:avLst/>
+          </a:prstGeom>
+          <a:noFill/>
+          <a:ln/>
+        </p:spPr>
+        <p:txBody>
+          <a:bodyPr wrap="square" lIns="0" tIns="0" rIns="0" bIns="0" rtlCol="0" anchor="ctr"/>
+          <a:lstStyle/>
+          <a:p>
+            <a:pPr indent="0" marL="0">
+              <a:buNone/>
+            </a:pPr>
+            <a:r>
+              <a:rPr lang="en-US" sz="1100" dirty="0">
+                <a:solidFill>
+                  <a:srgbClr val="667085"/>
+                </a:solidFill>
+                <a:latin typeface="IBM Plex Mono" pitchFamily="34" charset="0"/>
+                <a:ea typeface="IBM Plex Mono" pitchFamily="34" charset="-122"/>
+                <a:cs typeface="IBM Plex Mono" pitchFamily="34" charset="-120"/>
+              </a:rPr>
+              <a:t>1.5 Systems software  |  Lesson 4</a:t>
+            </a:r>
+            <a:endParaRPr lang="en-US" sz="1100" dirty="0"/>
+          </a:p>
+        </p:txBody>
+      </p:sp>
+      <p:sp>
+        <p:nvSpPr>
+          <p:cNvPr id="4" name="Text 2"/>
+          <p:cNvSpPr txBox="1"/>
+          <p:nvPr/>
+        </p:nvSpPr>
+        <p:spPr>
+          <a:xfrm>
+            <a:off x="9326880" y="6236208"/>
+            <a:ext cx="2377440" cy="365760"/>
+          </a:xfrm>
+          <a:prstGeom prst="rect">
+            <a:avLst/>
+          </a:prstGeom>
+          <a:noFill/>
+          <a:ln/>
+        </p:spPr>
+        <p:txBody>
+          <a:bodyPr wrap="square" lIns="0" tIns="0" rIns="0" bIns="0" rtlCol="0" anchor="ctr"/>
+          <a:lstStyle/>
+          <a:p>
+            <a:pPr algn="r" indent="0" marL="0">
+              <a:buNone/>
+            </a:pPr>
+            <a:r>
+              <a:rPr lang="en-US" sz="1100" dirty="0">
+                <a:solidFill>
+                  <a:srgbClr val="667085"/>
+                </a:solidFill>
+                <a:latin typeface="IBM Plex Mono" pitchFamily="34" charset="0"/>
+                <a:ea typeface="IBM Plex Mono" pitchFamily="34" charset="-122"/>
+                <a:cs typeface="IBM Plex Mono" pitchFamily="34" charset="-120"/>
+              </a:rPr>
+              <a:t>Revise 360</a:t>
+            </a:r>
+            <a:endParaRPr lang="en-US" sz="1100" dirty="0"/>
+          </a:p>
+        </p:txBody>
+      </p:sp>
+      <p:sp>
+        <p:nvSpPr>
+          <p:cNvPr id="5" name="Text 3"/>
+          <p:cNvSpPr txBox="1"/>
+          <p:nvPr/>
+        </p:nvSpPr>
+        <p:spPr>
+          <a:xfrm>
+            <a:off x="502920" y="411480"/>
+            <a:ext cx="11155680" cy="777240"/>
+          </a:xfrm>
+          <a:prstGeom prst="rect">
+            <a:avLst/>
+          </a:prstGeom>
+          <a:noFill/>
+          <a:ln/>
+        </p:spPr>
+        <p:txBody>
+          <a:bodyPr wrap="square" lIns="0" tIns="0" rIns="0" bIns="0" rtlCol="0" anchor="ctr"/>
+          <a:lstStyle/>
+          <a:p>
+            <a:pPr indent="0" marL="0">
+              <a:buNone/>
+            </a:pPr>
+            <a:r>
+              <a:rPr lang="en-US" sz="3200" b="1" dirty="0">
+                <a:solidFill>
+                  <a:srgbClr val="101828"/>
+                </a:solidFill>
+                <a:latin typeface="IBM Plex Sans" pitchFamily="34" charset="0"/>
+                <a:ea typeface="IBM Plex Sans" pitchFamily="34" charset="-122"/>
+                <a:cs typeface="IBM Plex Sans" pitchFamily="34" charset="-120"/>
+              </a:rPr>
+              <a:t>Exam practice</a:t>
+            </a:r>
+            <a:endParaRPr lang="en-US" sz="3200" dirty="0"/>
+          </a:p>
+        </p:txBody>
+      </p:sp>
+      <p:sp>
+        <p:nvSpPr>
+          <p:cNvPr id="6" name="Text 4"/>
+          <p:cNvSpPr txBox="1"/>
+          <p:nvPr/>
+        </p:nvSpPr>
+        <p:spPr>
+          <a:xfrm>
+            <a:off x="502920" y="1170432"/>
+            <a:ext cx="11155680" cy="411480"/>
+          </a:xfrm>
+          <a:prstGeom prst="rect">
+            <a:avLst/>
+          </a:prstGeom>
+          <a:noFill/>
+          <a:ln/>
+        </p:spPr>
+        <p:txBody>
+          <a:bodyPr wrap="square" lIns="0" tIns="0" rIns="0" bIns="0" rtlCol="0" anchor="ctr"/>
+          <a:lstStyle/>
+          <a:p>
+            <a:pPr indent="0" marL="0">
+              <a:buNone/>
+            </a:pPr>
+            <a:r>
+              <a:rPr lang="en-US" sz="1500" dirty="0">
+                <a:solidFill>
+                  <a:srgbClr val="667085"/>
+                </a:solidFill>
+                <a:latin typeface="IBM Plex Sans" pitchFamily="34" charset="0"/>
+                <a:ea typeface="IBM Plex Sans" pitchFamily="34" charset="-122"/>
+                <a:cs typeface="IBM Plex Sans" pitchFamily="34" charset="-120"/>
+              </a:rPr>
+              <a:t>Devices away. Answer from memory on the worksheet.</a:t>
+            </a:r>
+            <a:endParaRPr lang="en-US" sz="1500" dirty="0"/>
+          </a:p>
+        </p:txBody>
+      </p:sp>
+      <p:sp>
+        <p:nvSpPr>
+          <p:cNvPr id="7" name="Shape 5"/>
+          <p:cNvSpPr/>
+          <p:nvPr/>
+        </p:nvSpPr>
+        <p:spPr>
+          <a:xfrm>
+            <a:off x="502920" y="1828800"/>
+            <a:ext cx="11155680" cy="1097280"/>
+          </a:xfrm>
+          <a:prstGeom prst="roundRect">
+            <a:avLst>
+              <a:gd name="adj" fmla="val 10000"/>
+            </a:avLst>
+          </a:prstGeom>
+          <a:solidFill>
+            <a:srgbClr val="FFFFFF"/>
+          </a:solidFill>
+          <a:ln w="15875">
+            <a:solidFill>
+              <a:srgbClr val="D9DEE7"/>
+            </a:solidFill>
+            <a:prstDash val="solid"/>
+          </a:ln>
+        </p:spPr>
+      </p:sp>
+      <p:sp>
+        <p:nvSpPr>
+          <p:cNvPr id="8" name="Text 6"/>
+          <p:cNvSpPr txBox="1"/>
+          <p:nvPr/>
+        </p:nvSpPr>
+        <p:spPr>
+          <a:xfrm>
+            <a:off x="914400" y="1938528"/>
+            <a:ext cx="9418320" cy="877824"/>
+          </a:xfrm>
+          <a:prstGeom prst="rect">
+            <a:avLst/>
+          </a:prstGeom>
+          <a:noFill/>
+          <a:ln/>
+        </p:spPr>
+        <p:txBody>
+          <a:bodyPr wrap="square" lIns="0" tIns="0" rIns="0" bIns="0" rtlCol="0" anchor="ctr"/>
+          <a:lstStyle/>
+          <a:p>
+            <a:pPr indent="0" marL="0">
+              <a:lnSpc>
+                <a:spcPct val="118000"/>
+              </a:lnSpc>
+              <a:buNone/>
+            </a:pPr>
+            <a:r>
+              <a:rPr lang="en-US" sz="1700" dirty="0">
+                <a:solidFill>
+                  <a:srgbClr val="101828"/>
+                </a:solidFill>
+                <a:latin typeface="IBM Plex Sans" pitchFamily="34" charset="0"/>
+                <a:ea typeface="IBM Plex Sans" pitchFamily="34" charset="-122"/>
+                <a:cs typeface="IBM Plex Sans" pitchFamily="34" charset="-120"/>
+              </a:rPr>
+              <a:t>State what is meant by utility software, and give two examples.</a:t>
+            </a:r>
+            <a:endParaRPr lang="en-US" sz="1700" dirty="0"/>
+          </a:p>
+        </p:txBody>
+      </p:sp>
+      <p:sp>
+        <p:nvSpPr>
+          <p:cNvPr id="9" name="Shape 7"/>
+          <p:cNvSpPr/>
+          <p:nvPr/>
+        </p:nvSpPr>
+        <p:spPr>
+          <a:xfrm>
+            <a:off x="10515600" y="2130552"/>
+            <a:ext cx="868680" cy="493776"/>
+          </a:xfrm>
+          <a:prstGeom prst="roundRect">
+            <a:avLst>
+              <a:gd name="adj" fmla="val 18519"/>
+            </a:avLst>
+          </a:prstGeom>
+          <a:solidFill>
+            <a:srgbClr val="EEF2FB"/>
+          </a:solidFill>
+          <a:ln/>
+        </p:spPr>
+      </p:sp>
+      <p:sp>
+        <p:nvSpPr>
+          <p:cNvPr id="10" name="Text 8"/>
+          <p:cNvSpPr txBox="1"/>
+          <p:nvPr/>
+        </p:nvSpPr>
+        <p:spPr>
+          <a:xfrm>
+            <a:off x="10515600" y="2130552"/>
+            <a:ext cx="868680" cy="493776"/>
+          </a:xfrm>
+          <a:prstGeom prst="rect">
+            <a:avLst/>
+          </a:prstGeom>
+          <a:noFill/>
+          <a:ln/>
+        </p:spPr>
+        <p:txBody>
+          <a:bodyPr wrap="square" lIns="0" tIns="0" rIns="0" bIns="0" rtlCol="0" anchor="ctr"/>
+          <a:lstStyle/>
+          <a:p>
+            <a:pPr algn="ctr" indent="0" marL="0">
+              <a:buNone/>
+            </a:pPr>
+            <a:r>
+              <a:rPr lang="en-US" sz="1500" b="1" dirty="0">
+                <a:solidFill>
+                  <a:srgbClr val="2D63FF"/>
+                </a:solidFill>
+                <a:latin typeface="IBM Plex Mono" pitchFamily="34" charset="0"/>
+                <a:ea typeface="IBM Plex Mono" pitchFamily="34" charset="-122"/>
+                <a:cs typeface="IBM Plex Mono" pitchFamily="34" charset="-120"/>
+              </a:rPr>
+              <a:t>[3]</a:t>
+            </a:r>
+            <a:endParaRPr lang="en-US" sz="1500" dirty="0"/>
+          </a:p>
+        </p:txBody>
+      </p:sp>
+      <p:sp>
+        <p:nvSpPr>
+          <p:cNvPr id="11" name="Shape 9"/>
+          <p:cNvSpPr/>
+          <p:nvPr/>
+        </p:nvSpPr>
+        <p:spPr>
+          <a:xfrm>
+            <a:off x="502920" y="3127248"/>
+            <a:ext cx="11155680" cy="1097280"/>
+          </a:xfrm>
+          <a:prstGeom prst="roundRect">
+            <a:avLst>
+              <a:gd name="adj" fmla="val 10000"/>
+            </a:avLst>
+          </a:prstGeom>
+          <a:solidFill>
+            <a:srgbClr val="FFFFFF"/>
+          </a:solidFill>
+          <a:ln w="15875">
+            <a:solidFill>
+              <a:srgbClr val="D9DEE7"/>
+            </a:solidFill>
+            <a:prstDash val="solid"/>
+          </a:ln>
+        </p:spPr>
+      </p:sp>
+      <p:sp>
+        <p:nvSpPr>
+          <p:cNvPr id="12" name="Text 10"/>
+          <p:cNvSpPr txBox="1"/>
+          <p:nvPr/>
+        </p:nvSpPr>
+        <p:spPr>
+          <a:xfrm>
+            <a:off x="914400" y="3236976"/>
+            <a:ext cx="9418320" cy="877824"/>
+          </a:xfrm>
+          <a:prstGeom prst="rect">
+            <a:avLst/>
+          </a:prstGeom>
+          <a:noFill/>
+          <a:ln/>
+        </p:spPr>
+        <p:txBody>
+          <a:bodyPr wrap="square" lIns="0" tIns="0" rIns="0" bIns="0" rtlCol="0" anchor="ctr"/>
+          <a:lstStyle/>
+          <a:p>
+            <a:pPr indent="0" marL="0">
+              <a:lnSpc>
+                <a:spcPct val="118000"/>
+              </a:lnSpc>
+              <a:buNone/>
+            </a:pPr>
+            <a:r>
+              <a:rPr lang="en-US" sz="1700" dirty="0">
+                <a:solidFill>
+                  <a:srgbClr val="101828"/>
+                </a:solidFill>
+                <a:latin typeface="IBM Plex Sans" pitchFamily="34" charset="0"/>
+                <a:ea typeface="IBM Plex Sans" pitchFamily="34" charset="-122"/>
+                <a:cs typeface="IBM Plex Sans" pitchFamily="34" charset="-120"/>
+              </a:rPr>
+              <a:t>Describe how a defragmentation utility improves the performance of a hard disk drive.</a:t>
+            </a:r>
+            <a:endParaRPr lang="en-US" sz="1700" dirty="0"/>
+          </a:p>
+        </p:txBody>
+      </p:sp>
+      <p:sp>
+        <p:nvSpPr>
+          <p:cNvPr id="13" name="Shape 11"/>
+          <p:cNvSpPr/>
+          <p:nvPr/>
+        </p:nvSpPr>
+        <p:spPr>
+          <a:xfrm>
+            <a:off x="10515600" y="3429000"/>
+            <a:ext cx="868680" cy="493776"/>
+          </a:xfrm>
+          <a:prstGeom prst="roundRect">
+            <a:avLst>
+              <a:gd name="adj" fmla="val 18519"/>
+            </a:avLst>
+          </a:prstGeom>
+          <a:solidFill>
+            <a:srgbClr val="EEF2FB"/>
+          </a:solidFill>
+          <a:ln/>
+        </p:spPr>
+      </p:sp>
+      <p:sp>
+        <p:nvSpPr>
+          <p:cNvPr id="14" name="Text 12"/>
+          <p:cNvSpPr txBox="1"/>
+          <p:nvPr/>
+        </p:nvSpPr>
+        <p:spPr>
+          <a:xfrm>
+            <a:off x="10515600" y="3429000"/>
+            <a:ext cx="868680" cy="493776"/>
+          </a:xfrm>
+          <a:prstGeom prst="rect">
+            <a:avLst/>
+          </a:prstGeom>
+          <a:noFill/>
+          <a:ln/>
+        </p:spPr>
+        <p:txBody>
+          <a:bodyPr wrap="square" lIns="0" tIns="0" rIns="0" bIns="0" rtlCol="0" anchor="ctr"/>
+          <a:lstStyle/>
+          <a:p>
+            <a:pPr algn="ctr" indent="0" marL="0">
+              <a:buNone/>
+            </a:pPr>
+            <a:r>
+              <a:rPr lang="en-US" sz="1500" b="1" dirty="0">
+                <a:solidFill>
+                  <a:srgbClr val="2D63FF"/>
+                </a:solidFill>
+                <a:latin typeface="IBM Plex Mono" pitchFamily="34" charset="0"/>
+                <a:ea typeface="IBM Plex Mono" pitchFamily="34" charset="-122"/>
+                <a:cs typeface="IBM Plex Mono" pitchFamily="34" charset="-120"/>
+              </a:rPr>
+              <a:t>[4]</a:t>
+            </a:r>
+            <a:endParaRPr lang="en-US" sz="1500" dirty="0"/>
+          </a:p>
+        </p:txBody>
+      </p:sp>
+      <p:sp>
+        <p:nvSpPr>
+          <p:cNvPr id="15" name="Shape 13"/>
+          <p:cNvSpPr/>
+          <p:nvPr/>
+        </p:nvSpPr>
+        <p:spPr>
+          <a:xfrm>
+            <a:off x="502920" y="4425696"/>
+            <a:ext cx="11155680" cy="1097280"/>
+          </a:xfrm>
+          <a:prstGeom prst="roundRect">
+            <a:avLst>
+              <a:gd name="adj" fmla="val 10000"/>
+            </a:avLst>
+          </a:prstGeom>
+          <a:solidFill>
+            <a:srgbClr val="FFFFFF"/>
+          </a:solidFill>
+          <a:ln w="15875">
+            <a:solidFill>
+              <a:srgbClr val="D9DEE7"/>
+            </a:solidFill>
+            <a:prstDash val="solid"/>
+          </a:ln>
+        </p:spPr>
+      </p:sp>
+      <p:sp>
+        <p:nvSpPr>
+          <p:cNvPr id="16" name="Text 14"/>
+          <p:cNvSpPr txBox="1"/>
+          <p:nvPr/>
+        </p:nvSpPr>
+        <p:spPr>
+          <a:xfrm>
+            <a:off x="914400" y="4535424"/>
+            <a:ext cx="9418320" cy="877824"/>
+          </a:xfrm>
+          <a:prstGeom prst="rect">
+            <a:avLst/>
+          </a:prstGeom>
+          <a:noFill/>
+          <a:ln/>
+        </p:spPr>
+        <p:txBody>
+          <a:bodyPr wrap="square" lIns="0" tIns="0" rIns="0" bIns="0" rtlCol="0" anchor="ctr"/>
+          <a:lstStyle/>
+          <a:p>
+            <a:pPr indent="0" marL="0">
+              <a:lnSpc>
+                <a:spcPct val="118000"/>
+              </a:lnSpc>
+              <a:buNone/>
+            </a:pPr>
+            <a:r>
+              <a:rPr lang="en-US" sz="1700" dirty="0">
+                <a:solidFill>
+                  <a:srgbClr val="101828"/>
+                </a:solidFill>
+                <a:latin typeface="IBM Plex Sans" pitchFamily="34" charset="0"/>
+                <a:ea typeface="IBM Plex Sans" pitchFamily="34" charset="-122"/>
+                <a:cs typeface="IBM Plex Sans" pitchFamily="34" charset="-120"/>
+              </a:rPr>
+              <a:t>A company gives every employee a laptop that leaves the building. Recommend two utilities and justify each choice.</a:t>
+            </a:r>
+            <a:endParaRPr lang="en-US" sz="1700" dirty="0"/>
+          </a:p>
+        </p:txBody>
+      </p:sp>
+      <p:sp>
+        <p:nvSpPr>
+          <p:cNvPr id="17" name="Shape 15"/>
+          <p:cNvSpPr/>
+          <p:nvPr/>
+        </p:nvSpPr>
+        <p:spPr>
+          <a:xfrm>
+            <a:off x="10515600" y="4727448"/>
+            <a:ext cx="868680" cy="493776"/>
+          </a:xfrm>
+          <a:prstGeom prst="roundRect">
+            <a:avLst>
+              <a:gd name="adj" fmla="val 18519"/>
+            </a:avLst>
+          </a:prstGeom>
+          <a:solidFill>
+            <a:srgbClr val="EEF2FB"/>
+          </a:solidFill>
+          <a:ln/>
+        </p:spPr>
+      </p:sp>
+      <p:sp>
+        <p:nvSpPr>
+          <p:cNvPr id="18" name="Text 16"/>
+          <p:cNvSpPr txBox="1"/>
+          <p:nvPr/>
+        </p:nvSpPr>
+        <p:spPr>
+          <a:xfrm>
+            <a:off x="10515600" y="4727448"/>
+            <a:ext cx="868680" cy="493776"/>
+          </a:xfrm>
+          <a:prstGeom prst="rect">
+            <a:avLst/>
+          </a:prstGeom>
+          <a:noFill/>
+          <a:ln/>
+        </p:spPr>
+        <p:txBody>
+          <a:bodyPr wrap="square" lIns="0" tIns="0" rIns="0" bIns="0" rtlCol="0" anchor="ctr"/>
+          <a:lstStyle/>
+          <a:p>
+            <a:pPr algn="ctr" indent="0" marL="0">
+              <a:buNone/>
+            </a:pPr>
+            <a:r>
+              <a:rPr lang="en-US" sz="1500" b="1" dirty="0">
+                <a:solidFill>
+                  <a:srgbClr val="2D63FF"/>
+                </a:solidFill>
+                <a:latin typeface="IBM Plex Mono" pitchFamily="34" charset="0"/>
+                <a:ea typeface="IBM Plex Mono" pitchFamily="34" charset="-122"/>
+                <a:cs typeface="IBM Plex Mono" pitchFamily="34" charset="-120"/>
+              </a:rPr>
+              <a:t>[6]</a:t>
+            </a:r>
+            <a:endParaRPr lang="en-US" sz="1500" dirty="0"/>
+          </a:p>
+        </p:txBody>
+      </p:sp>
+    </p:spTree>
+  </p:cSld>
+  <p:clrMapOvr>
+    <a:masterClrMapping/>
+  </p:clrMapOvr>
+</p:sld>
+</file>
+
+<file path=ppt/slides/slide15.xml><?xml version="1.0" encoding="utf-8"?>
+<p:sld xmlns:a="http://schemas.openxmlformats.org/drawingml/2006/main" xmlns:r="http://schemas.openxmlformats.org/officeDocument/2006/relationships" xmlns:p="http://schemas.openxmlformats.org/presentationml/2006/main">
+  <p:cSld name="Slide 15">
     <p:bg>
       <p:bgPr>
         <a:solidFill>
